--- a/Calendario2026/Presentaciones/14_SSH.pptx
+++ b/Calendario2026/Presentaciones/14_SSH.pptx
@@ -5,7 +5,7 @@
     <p:sldMasterId id="2147483648" r:id="rId1"/>
   </p:sldMasterIdLst>
   <p:notesMasterIdLst>
-    <p:notesMasterId r:id="rId8"/>
+    <p:notesMasterId r:id="rId9"/>
   </p:notesMasterIdLst>
   <p:sldIdLst>
     <p:sldId id="257" r:id="rId2"/>
@@ -14,6 +14,7 @@
     <p:sldId id="323" r:id="rId5"/>
     <p:sldId id="325" r:id="rId6"/>
     <p:sldId id="326" r:id="rId7"/>
+    <p:sldId id="327" r:id="rId8"/>
   </p:sldIdLst>
   <p:sldSz cx="9144000" cy="6858000" type="screen4x3"/>
   <p:notesSz cx="6858000" cy="9144000"/>
@@ -131,6 +132,35 @@
 </p:presentation>
 </file>
 
+<file path=ppt/changesInfos/changesInfo1.xml><?xml version="1.0" encoding="utf-8"?>
+<pc:chgInfo xmlns:a="http://schemas.openxmlformats.org/drawingml/2006/main" xmlns:r="http://schemas.openxmlformats.org/officeDocument/2006/relationships" xmlns:ac="http://schemas.microsoft.com/office/drawing/2013/main/command" xmlns:pc="http://schemas.microsoft.com/office/powerpoint/2013/main/command">
+  <pc:docChgLst>
+    <pc:chgData name="Lizethe Pérez Fuertes" userId="4ae9ef87-2a7d-42f8-8dfa-0a501a9e2ff4" providerId="ADAL" clId="{FDDD45CB-1330-4033-A842-3D2746AFF7C7}"/>
+    <pc:docChg chg="undo custSel modSld">
+      <pc:chgData name="Lizethe Pérez Fuertes" userId="4ae9ef87-2a7d-42f8-8dfa-0a501a9e2ff4" providerId="ADAL" clId="{FDDD45CB-1330-4033-A842-3D2746AFF7C7}" dt="2026-03-02T20:55:42.908" v="6" actId="6549"/>
+      <pc:docMkLst>
+        <pc:docMk/>
+      </pc:docMkLst>
+      <pc:sldChg chg="modSp mod">
+        <pc:chgData name="Lizethe Pérez Fuertes" userId="4ae9ef87-2a7d-42f8-8dfa-0a501a9e2ff4" providerId="ADAL" clId="{FDDD45CB-1330-4033-A842-3D2746AFF7C7}" dt="2026-03-02T20:55:42.908" v="6" actId="6549"/>
+        <pc:sldMkLst>
+          <pc:docMk/>
+          <pc:sldMk cId="1751793460" sldId="327"/>
+        </pc:sldMkLst>
+        <pc:spChg chg="mod">
+          <ac:chgData name="Lizethe Pérez Fuertes" userId="4ae9ef87-2a7d-42f8-8dfa-0a501a9e2ff4" providerId="ADAL" clId="{FDDD45CB-1330-4033-A842-3D2746AFF7C7}" dt="2026-03-02T20:55:42.908" v="6" actId="6549"/>
+          <ac:spMkLst>
+            <pc:docMk/>
+            <pc:sldMk cId="1751793460" sldId="327"/>
+            <ac:spMk id="8" creationId="{A3A4593B-5ECA-9D8B-73D2-5050A77BF01B}"/>
+          </ac:spMkLst>
+        </pc:spChg>
+      </pc:sldChg>
+    </pc:docChg>
+  </pc:docChgLst>
+</pc:chgInfo>
+</file>
+
 <file path=ppt/notesMasters/notesMaster1.xml><?xml version="1.0" encoding="utf-8"?>
 <p:notesMaster xmlns:a="http://schemas.openxmlformats.org/drawingml/2006/main" xmlns:r="http://schemas.openxmlformats.org/officeDocument/2006/relationships" xmlns:p="http://schemas.openxmlformats.org/presentationml/2006/main">
   <p:cSld>
@@ -213,7 +243,7 @@
           <a:p>
             <a:fld id="{2D445F07-8756-451B-A938-0248325FC7BB}" type="datetimeFigureOut">
               <a:rPr lang="es-MX" smtClean="0"/>
-              <a:t>01/06/2025</a:t>
+              <a:t>02/03/2026</a:t>
             </a:fld>
             <a:endParaRPr lang="es-MX" dirty="0"/>
           </a:p>
@@ -372,7 +402,7 @@
           <a:p>
             <a:fld id="{5993AEC0-242E-4FA7-9D3C-51E1036AC3CB}" type="slidenum">
               <a:rPr lang="es-MX" smtClean="0"/>
-              <a:t>‹#›</a:t>
+              <a:t>‹Nº›</a:t>
             </a:fld>
             <a:endParaRPr lang="es-MX" dirty="0"/>
           </a:p>
@@ -815,6 +845,69 @@
 </p:notes>
 </file>
 
+<file path=ppt/notesSlides/notesSlide7.xml><?xml version="1.0" encoding="utf-8"?>
+<p:notes xmlns:a="http://schemas.openxmlformats.org/drawingml/2006/main" xmlns:r="http://schemas.openxmlformats.org/officeDocument/2006/relationships" xmlns:p="http://schemas.openxmlformats.org/presentationml/2006/main">
+  <p:cSld>
+    <p:spTree>
+      <p:nvGrpSpPr>
+        <p:cNvPr id="1" name="">
+          <a:extLst>
+            <a:ext uri="{FF2B5EF4-FFF2-40B4-BE49-F238E27FC236}">
+              <a16:creationId xmlns:a16="http://schemas.microsoft.com/office/drawing/2014/main" id="{D7510015-0466-FB14-F91E-31E4F0A633FF}"/>
+            </a:ext>
+          </a:extLst>
+        </p:cNvPr>
+        <p:cNvGrpSpPr/>
+        <p:nvPr/>
+      </p:nvGrpSpPr>
+      <p:grpSpPr>
+        <a:xfrm>
+          <a:off x="0" y="0"/>
+          <a:ext cx="0" cy="0"/>
+          <a:chOff x="0" y="0"/>
+          <a:chExt cx="0" cy="0"/>
+        </a:xfrm>
+      </p:grpSpPr>
+      <p:sp>
+        <p:nvSpPr>
+          <p:cNvPr id="2" name="Notes Placeholder">
+            <a:extLst>
+              <a:ext uri="{FF2B5EF4-FFF2-40B4-BE49-F238E27FC236}">
+                <a16:creationId xmlns:a16="http://schemas.microsoft.com/office/drawing/2014/main" id="{F583C4EA-2726-0F98-1C12-E60574888871}"/>
+              </a:ext>
+            </a:extLst>
+          </p:cNvPr>
+          <p:cNvSpPr>
+            <a:spLocks noGrp="1"/>
+          </p:cNvSpPr>
+          <p:nvPr>
+            <p:ph type="body" idx="1"/>
+          </p:nvPr>
+        </p:nvSpPr>
+        <p:spPr/>
+        <p:txBody>
+          <a:bodyPr>
+            <a:normAutofit/>
+          </a:bodyPr>
+          <a:lstStyle/>
+          <a:p>
+            <a:endParaRPr/>
+          </a:p>
+        </p:txBody>
+      </p:sp>
+    </p:spTree>
+    <p:extLst>
+      <p:ext uri="{BB962C8B-B14F-4D97-AF65-F5344CB8AC3E}">
+        <p14:creationId xmlns:p14="http://schemas.microsoft.com/office/powerpoint/2010/main" val="3554132902"/>
+      </p:ext>
+    </p:extLst>
+  </p:cSld>
+  <p:clrMapOvr>
+    <a:masterClrMapping/>
+  </p:clrMapOvr>
+</p:notes>
+</file>
+
 <file path=ppt/slideLayouts/slideLayout1.xml><?xml version="1.0" encoding="utf-8"?>
 <p:sldLayout xmlns:a="http://schemas.openxmlformats.org/drawingml/2006/main" xmlns:r="http://schemas.openxmlformats.org/officeDocument/2006/relationships" xmlns:p="http://schemas.openxmlformats.org/presentationml/2006/main" type="title" preserve="1">
   <p:cSld name="Diapositiva de título">
@@ -996,7 +1089,7 @@
           <a:p>
             <a:fld id="{5E75A0DC-66C6-4CEC-A5EB-F8C97CEC3796}" type="datetimeFigureOut">
               <a:rPr lang="es-MX" smtClean="0"/>
-              <a:t>01/06/2025</a:t>
+              <a:t>02/03/2026</a:t>
             </a:fld>
             <a:endParaRPr lang="es-MX" dirty="0"/>
           </a:p>
@@ -1038,7 +1131,7 @@
           <a:p>
             <a:fld id="{C077EE1E-7A06-4E7F-9AFB-189FC69B7B0C}" type="slidenum">
               <a:rPr lang="es-MX" smtClean="0"/>
-              <a:t>‹#›</a:t>
+              <a:t>‹Nº›</a:t>
             </a:fld>
             <a:endParaRPr lang="es-MX" dirty="0"/>
           </a:p>
@@ -1166,7 +1259,7 @@
           <a:p>
             <a:fld id="{5E75A0DC-66C6-4CEC-A5EB-F8C97CEC3796}" type="datetimeFigureOut">
               <a:rPr lang="es-MX" smtClean="0"/>
-              <a:t>01/06/2025</a:t>
+              <a:t>02/03/2026</a:t>
             </a:fld>
             <a:endParaRPr lang="es-MX" dirty="0"/>
           </a:p>
@@ -1208,7 +1301,7 @@
           <a:p>
             <a:fld id="{C077EE1E-7A06-4E7F-9AFB-189FC69B7B0C}" type="slidenum">
               <a:rPr lang="es-MX" smtClean="0"/>
-              <a:t>‹#›</a:t>
+              <a:t>‹Nº›</a:t>
             </a:fld>
             <a:endParaRPr lang="es-MX" dirty="0"/>
           </a:p>
@@ -1346,7 +1439,7 @@
           <a:p>
             <a:fld id="{5E75A0DC-66C6-4CEC-A5EB-F8C97CEC3796}" type="datetimeFigureOut">
               <a:rPr lang="es-MX" smtClean="0"/>
-              <a:t>01/06/2025</a:t>
+              <a:t>02/03/2026</a:t>
             </a:fld>
             <a:endParaRPr lang="es-MX" dirty="0"/>
           </a:p>
@@ -1388,7 +1481,7 @@
           <a:p>
             <a:fld id="{C077EE1E-7A06-4E7F-9AFB-189FC69B7B0C}" type="slidenum">
               <a:rPr lang="es-MX" smtClean="0"/>
-              <a:t>‹#›</a:t>
+              <a:t>‹Nº›</a:t>
             </a:fld>
             <a:endParaRPr lang="es-MX" dirty="0"/>
           </a:p>
@@ -1480,7 +1573,7 @@
           <a:p>
             <a:fld id="{1D8BD707-D9CF-40AE-B4C6-C98DA3205C09}" type="datetimeFigureOut">
               <a:rPr lang="en-US"/>
-              <a:t>6/1/2025</a:t>
+              <a:t>3/2/2026</a:t>
             </a:fld>
             <a:endParaRPr lang="en-US"/>
           </a:p>
@@ -1512,7 +1605,7 @@
           </a:lstStyle>
           <a:p>
             <a:fld id="{B6F15528-21DE-4FAA-801E-634DDDAF4B2B}" type="slidenum">
-              <a:t>‹#›</a:t>
+              <a:t>‹Nº›</a:t>
             </a:fld>
             <a:endParaRPr/>
           </a:p>
@@ -1640,7 +1733,7 @@
           <a:p>
             <a:fld id="{5E75A0DC-66C6-4CEC-A5EB-F8C97CEC3796}" type="datetimeFigureOut">
               <a:rPr lang="es-MX" smtClean="0"/>
-              <a:t>01/06/2025</a:t>
+              <a:t>02/03/2026</a:t>
             </a:fld>
             <a:endParaRPr lang="es-MX" dirty="0"/>
           </a:p>
@@ -1682,7 +1775,7 @@
           <a:p>
             <a:fld id="{C077EE1E-7A06-4E7F-9AFB-189FC69B7B0C}" type="slidenum">
               <a:rPr lang="es-MX" smtClean="0"/>
-              <a:t>‹#›</a:t>
+              <a:t>‹Nº›</a:t>
             </a:fld>
             <a:endParaRPr lang="es-MX" dirty="0"/>
           </a:p>
@@ -1886,7 +1979,7 @@
           <a:p>
             <a:fld id="{5E75A0DC-66C6-4CEC-A5EB-F8C97CEC3796}" type="datetimeFigureOut">
               <a:rPr lang="es-MX" smtClean="0"/>
-              <a:t>01/06/2025</a:t>
+              <a:t>02/03/2026</a:t>
             </a:fld>
             <a:endParaRPr lang="es-MX" dirty="0"/>
           </a:p>
@@ -1928,7 +2021,7 @@
           <a:p>
             <a:fld id="{C077EE1E-7A06-4E7F-9AFB-189FC69B7B0C}" type="slidenum">
               <a:rPr lang="es-MX" smtClean="0"/>
-              <a:t>‹#›</a:t>
+              <a:t>‹Nº›</a:t>
             </a:fld>
             <a:endParaRPr lang="es-MX" dirty="0"/>
           </a:p>
@@ -2174,7 +2267,7 @@
           <a:p>
             <a:fld id="{5E75A0DC-66C6-4CEC-A5EB-F8C97CEC3796}" type="datetimeFigureOut">
               <a:rPr lang="es-MX" smtClean="0"/>
-              <a:t>01/06/2025</a:t>
+              <a:t>02/03/2026</a:t>
             </a:fld>
             <a:endParaRPr lang="es-MX" dirty="0"/>
           </a:p>
@@ -2216,7 +2309,7 @@
           <a:p>
             <a:fld id="{C077EE1E-7A06-4E7F-9AFB-189FC69B7B0C}" type="slidenum">
               <a:rPr lang="es-MX" smtClean="0"/>
-              <a:t>‹#›</a:t>
+              <a:t>‹Nº›</a:t>
             </a:fld>
             <a:endParaRPr lang="es-MX" dirty="0"/>
           </a:p>
@@ -2596,7 +2689,7 @@
           <a:p>
             <a:fld id="{5E75A0DC-66C6-4CEC-A5EB-F8C97CEC3796}" type="datetimeFigureOut">
               <a:rPr lang="es-MX" smtClean="0"/>
-              <a:t>01/06/2025</a:t>
+              <a:t>02/03/2026</a:t>
             </a:fld>
             <a:endParaRPr lang="es-MX" dirty="0"/>
           </a:p>
@@ -2638,7 +2731,7 @@
           <a:p>
             <a:fld id="{C077EE1E-7A06-4E7F-9AFB-189FC69B7B0C}" type="slidenum">
               <a:rPr lang="es-MX" smtClean="0"/>
-              <a:t>‹#›</a:t>
+              <a:t>‹Nº›</a:t>
             </a:fld>
             <a:endParaRPr lang="es-MX" dirty="0"/>
           </a:p>
@@ -2714,7 +2807,7 @@
           <a:p>
             <a:fld id="{5E75A0DC-66C6-4CEC-A5EB-F8C97CEC3796}" type="datetimeFigureOut">
               <a:rPr lang="es-MX" smtClean="0"/>
-              <a:t>01/06/2025</a:t>
+              <a:t>02/03/2026</a:t>
             </a:fld>
             <a:endParaRPr lang="es-MX" dirty="0"/>
           </a:p>
@@ -2756,7 +2849,7 @@
           <a:p>
             <a:fld id="{C077EE1E-7A06-4E7F-9AFB-189FC69B7B0C}" type="slidenum">
               <a:rPr lang="es-MX" smtClean="0"/>
-              <a:t>‹#›</a:t>
+              <a:t>‹Nº›</a:t>
             </a:fld>
             <a:endParaRPr lang="es-MX" dirty="0"/>
           </a:p>
@@ -2809,7 +2902,7 @@
           <a:p>
             <a:fld id="{5E75A0DC-66C6-4CEC-A5EB-F8C97CEC3796}" type="datetimeFigureOut">
               <a:rPr lang="es-MX" smtClean="0"/>
-              <a:t>01/06/2025</a:t>
+              <a:t>02/03/2026</a:t>
             </a:fld>
             <a:endParaRPr lang="es-MX" dirty="0"/>
           </a:p>
@@ -2851,7 +2944,7 @@
           <a:p>
             <a:fld id="{C077EE1E-7A06-4E7F-9AFB-189FC69B7B0C}" type="slidenum">
               <a:rPr lang="es-MX" smtClean="0"/>
-              <a:t>‹#›</a:t>
+              <a:t>‹Nº›</a:t>
             </a:fld>
             <a:endParaRPr lang="es-MX" dirty="0"/>
           </a:p>
@@ -3086,7 +3179,7 @@
           <a:p>
             <a:fld id="{5E75A0DC-66C6-4CEC-A5EB-F8C97CEC3796}" type="datetimeFigureOut">
               <a:rPr lang="es-MX" smtClean="0"/>
-              <a:t>01/06/2025</a:t>
+              <a:t>02/03/2026</a:t>
             </a:fld>
             <a:endParaRPr lang="es-MX" dirty="0"/>
           </a:p>
@@ -3128,7 +3221,7 @@
           <a:p>
             <a:fld id="{C077EE1E-7A06-4E7F-9AFB-189FC69B7B0C}" type="slidenum">
               <a:rPr lang="es-MX" smtClean="0"/>
-              <a:t>‹#›</a:t>
+              <a:t>‹Nº›</a:t>
             </a:fld>
             <a:endParaRPr lang="es-MX" dirty="0"/>
           </a:p>
@@ -3339,7 +3432,7 @@
           <a:p>
             <a:fld id="{5E75A0DC-66C6-4CEC-A5EB-F8C97CEC3796}" type="datetimeFigureOut">
               <a:rPr lang="es-MX" smtClean="0"/>
-              <a:t>01/06/2025</a:t>
+              <a:t>02/03/2026</a:t>
             </a:fld>
             <a:endParaRPr lang="es-MX" dirty="0"/>
           </a:p>
@@ -3381,7 +3474,7 @@
           <a:p>
             <a:fld id="{C077EE1E-7A06-4E7F-9AFB-189FC69B7B0C}" type="slidenum">
               <a:rPr lang="es-MX" smtClean="0"/>
-              <a:t>‹#›</a:t>
+              <a:t>‹Nº›</a:t>
             </a:fld>
             <a:endParaRPr lang="es-MX" dirty="0"/>
           </a:p>
@@ -3552,7 +3645,7 @@
           <a:p>
             <a:fld id="{5E75A0DC-66C6-4CEC-A5EB-F8C97CEC3796}" type="datetimeFigureOut">
               <a:rPr lang="es-MX" smtClean="0"/>
-              <a:t>01/06/2025</a:t>
+              <a:t>02/03/2026</a:t>
             </a:fld>
             <a:endParaRPr lang="es-MX" dirty="0"/>
           </a:p>
@@ -3630,7 +3723,7 @@
           <a:p>
             <a:fld id="{C077EE1E-7A06-4E7F-9AFB-189FC69B7B0C}" type="slidenum">
               <a:rPr lang="es-MX" smtClean="0"/>
-              <a:t>‹#›</a:t>
+              <a:t>‹Nº›</a:t>
             </a:fld>
             <a:endParaRPr lang="es-MX" dirty="0"/>
           </a:p>
@@ -5782,6 +5875,556 @@
     <p:extLst>
       <p:ext uri="{BB962C8B-B14F-4D97-AF65-F5344CB8AC3E}">
         <p14:creationId xmlns:p14="http://schemas.microsoft.com/office/powerpoint/2010/main" val="2658823721"/>
+      </p:ext>
+    </p:extLst>
+  </p:cSld>
+  <p:clrMapOvr>
+    <a:masterClrMapping/>
+  </p:clrMapOvr>
+</p:sld>
+</file>
+
+<file path=ppt/slides/slide7.xml><?xml version="1.0" encoding="utf-8"?>
+<p:sld xmlns:a="http://schemas.openxmlformats.org/drawingml/2006/main" xmlns:r="http://schemas.openxmlformats.org/officeDocument/2006/relationships" xmlns:p="http://schemas.openxmlformats.org/presentationml/2006/main">
+  <p:cSld>
+    <p:spTree>
+      <p:nvGrpSpPr>
+        <p:cNvPr id="1" name="">
+          <a:extLst>
+            <a:ext uri="{FF2B5EF4-FFF2-40B4-BE49-F238E27FC236}">
+              <a16:creationId xmlns:a16="http://schemas.microsoft.com/office/drawing/2014/main" id="{3FEF70C1-B50B-89F6-E0FB-5E28113FDBB7}"/>
+            </a:ext>
+          </a:extLst>
+        </p:cNvPr>
+        <p:cNvGrpSpPr/>
+        <p:nvPr/>
+      </p:nvGrpSpPr>
+      <p:grpSpPr>
+        <a:xfrm>
+          <a:off x="0" y="0"/>
+          <a:ext cx="0" cy="0"/>
+          <a:chOff x="0" y="0"/>
+          <a:chExt cx="0" cy="0"/>
+        </a:xfrm>
+      </p:grpSpPr>
+      <p:pic>
+        <p:nvPicPr>
+          <p:cNvPr id="4" name="Imagen 3">
+            <a:extLst>
+              <a:ext uri="{FF2B5EF4-FFF2-40B4-BE49-F238E27FC236}">
+                <a16:creationId xmlns:a16="http://schemas.microsoft.com/office/drawing/2014/main" id="{5C9A2A9D-FA83-8E63-AC6B-EDAF8F8F937B}"/>
+              </a:ext>
+            </a:extLst>
+          </p:cNvPr>
+          <p:cNvPicPr>
+            <a:picLocks noChangeAspect="1"/>
+          </p:cNvPicPr>
+          <p:nvPr/>
+        </p:nvPicPr>
+        <p:blipFill>
+          <a:blip r:embed="rId3"/>
+          <a:stretch>
+            <a:fillRect/>
+          </a:stretch>
+        </p:blipFill>
+        <p:spPr>
+          <a:xfrm>
+            <a:off x="4824685" y="3717032"/>
+            <a:ext cx="3796650" cy="2773205"/>
+          </a:xfrm>
+          <a:prstGeom prst="rect">
+            <a:avLst/>
+          </a:prstGeom>
+        </p:spPr>
+      </p:pic>
+      <p:sp>
+        <p:nvSpPr>
+          <p:cNvPr id="21" name="Rectangle 2">
+            <a:extLst>
+              <a:ext uri="{FF2B5EF4-FFF2-40B4-BE49-F238E27FC236}">
+                <a16:creationId xmlns:a16="http://schemas.microsoft.com/office/drawing/2014/main" id="{A17D28D0-9347-72C4-4115-6CFECDF6B6A6}"/>
+              </a:ext>
+            </a:extLst>
+          </p:cNvPr>
+          <p:cNvSpPr txBox="1">
+            <a:spLocks noChangeArrowheads="1"/>
+          </p:cNvSpPr>
+          <p:nvPr/>
+        </p:nvSpPr>
+        <p:spPr>
+          <a:xfrm>
+            <a:off x="18298" y="125760"/>
+            <a:ext cx="8964488" cy="1143000"/>
+          </a:xfrm>
+          <a:prstGeom prst="rect">
+            <a:avLst/>
+          </a:prstGeom>
+          <a:solidFill>
+            <a:schemeClr val="bg1"/>
+          </a:solidFill>
+        </p:spPr>
+        <p:txBody>
+          <a:bodyPr vert="horz" lIns="92075" tIns="46038" rIns="92075" bIns="46038" rtlCol="0" anchor="ctr">
+            <a:noAutofit/>
+          </a:bodyPr>
+          <a:lstStyle>
+            <a:lvl1pPr algn="ctr" defTabSz="914400" rtl="0" eaLnBrk="1" latinLnBrk="0" hangingPunct="1">
+              <a:spcBef>
+                <a:spcPct val="0"/>
+              </a:spcBef>
+              <a:buNone/>
+              <a:defRPr sz="4400" kern="1200">
+                <a:solidFill>
+                  <a:schemeClr val="tx1"/>
+                </a:solidFill>
+                <a:latin typeface="+mj-lt"/>
+                <a:ea typeface="+mj-ea"/>
+                <a:cs typeface="+mj-cs"/>
+              </a:defRPr>
+            </a:lvl1pPr>
+          </a:lstStyle>
+          <a:p>
+            <a:pPr>
+              <a:defRPr/>
+            </a:pPr>
+            <a:r>
+              <a:rPr lang="es-ES_tradnl" sz="3200" dirty="0">
+                <a:solidFill>
+                  <a:srgbClr val="3333CC"/>
+                </a:solidFill>
+                <a:effectLst>
+                  <a:outerShdw blurRad="38100" dist="38100" dir="2700000" algn="tl">
+                    <a:srgbClr val="C0C0C0"/>
+                  </a:outerShdw>
+                </a:effectLst>
+                <a:latin typeface="Dom Casual" charset="0"/>
+              </a:rPr>
+              <a:t> </a:t>
+            </a:r>
+            <a:r>
+              <a:rPr lang="es-ES_tradnl" sz="3200" b="1" dirty="0">
+                <a:solidFill>
+                  <a:schemeClr val="accent4">
+                    <a:lumMod val="50000"/>
+                  </a:schemeClr>
+                </a:solidFill>
+                <a:effectLst>
+                  <a:outerShdw blurRad="38100" dist="38100" dir="2700000" algn="tl">
+                    <a:srgbClr val="C0C0C0"/>
+                  </a:outerShdw>
+                </a:effectLst>
+                <a:latin typeface="Dom Casual" charset="0"/>
+              </a:rPr>
+              <a:t>Configuración de SSH para la administración remota</a:t>
+            </a:r>
+            <a:endParaRPr lang="es-ES_tradnl" sz="2400" b="1" dirty="0">
+              <a:solidFill>
+                <a:schemeClr val="accent5">
+                  <a:lumMod val="75000"/>
+                </a:schemeClr>
+              </a:solidFill>
+              <a:effectLst>
+                <a:outerShdw blurRad="38100" dist="38100" dir="2700000" algn="tl">
+                  <a:srgbClr val="C0C0C0"/>
+                </a:outerShdw>
+              </a:effectLst>
+              <a:latin typeface="Dom Casual" charset="0"/>
+            </a:endParaRPr>
+          </a:p>
+        </p:txBody>
+      </p:sp>
+      <p:sp>
+        <p:nvSpPr>
+          <p:cNvPr id="8" name="CuadroTexto 7">
+            <a:extLst>
+              <a:ext uri="{FF2B5EF4-FFF2-40B4-BE49-F238E27FC236}">
+                <a16:creationId xmlns:a16="http://schemas.microsoft.com/office/drawing/2014/main" id="{A3A4593B-5ECA-9D8B-73D2-5050A77BF01B}"/>
+              </a:ext>
+            </a:extLst>
+          </p:cNvPr>
+          <p:cNvSpPr txBox="1"/>
+          <p:nvPr/>
+        </p:nvSpPr>
+        <p:spPr>
+          <a:xfrm>
+            <a:off x="629858" y="1338492"/>
+            <a:ext cx="8352928" cy="3509935"/>
+          </a:xfrm>
+          <a:prstGeom prst="rect">
+            <a:avLst/>
+          </a:prstGeom>
+          <a:noFill/>
+        </p:spPr>
+        <p:txBody>
+          <a:bodyPr wrap="square">
+            <a:spAutoFit/>
+          </a:bodyPr>
+          <a:lstStyle/>
+          <a:p>
+            <a:pPr marL="342900" indent="-342900" algn="just" fontAlgn="base">
+              <a:lnSpc>
+                <a:spcPts val="2500"/>
+              </a:lnSpc>
+              <a:buFont typeface="+mj-lt"/>
+              <a:buAutoNum type="arabicPeriod"/>
+            </a:pPr>
+            <a:r>
+              <a:rPr lang="es-MX" dirty="0"/>
+              <a:t>Configurar un </a:t>
+            </a:r>
+            <a:r>
+              <a:rPr lang="es-MX" b="1" dirty="0"/>
+              <a:t>nombre de dominio</a:t>
+            </a:r>
+            <a:endParaRPr lang="es-MX" dirty="0"/>
+          </a:p>
+          <a:p>
+            <a:pPr lvl="1" algn="just" fontAlgn="base">
+              <a:lnSpc>
+                <a:spcPts val="2500"/>
+              </a:lnSpc>
+              <a:spcAft>
+                <a:spcPts val="600"/>
+              </a:spcAft>
+            </a:pPr>
+            <a:r>
+              <a:rPr lang="es-MX" b="1" dirty="0" err="1">
+                <a:solidFill>
+                  <a:schemeClr val="accent6">
+                    <a:lumMod val="75000"/>
+                  </a:schemeClr>
+                </a:solidFill>
+              </a:rPr>
+              <a:t>ip</a:t>
+            </a:r>
+            <a:r>
+              <a:rPr lang="es-MX" b="1" dirty="0">
+                <a:solidFill>
+                  <a:schemeClr val="accent6">
+                    <a:lumMod val="75000"/>
+                  </a:schemeClr>
+                </a:solidFill>
+              </a:rPr>
+              <a:t> </a:t>
+            </a:r>
+            <a:r>
+              <a:rPr lang="es-MX" b="1" dirty="0" err="1">
+                <a:solidFill>
+                  <a:schemeClr val="accent6">
+                    <a:lumMod val="75000"/>
+                  </a:schemeClr>
+                </a:solidFill>
+              </a:rPr>
+              <a:t>domain-name</a:t>
+            </a:r>
+            <a:r>
+              <a:rPr lang="es-MX" b="1" dirty="0">
+                <a:solidFill>
+                  <a:schemeClr val="accent6">
+                    <a:lumMod val="75000"/>
+                  </a:schemeClr>
+                </a:solidFill>
+              </a:rPr>
+              <a:t> </a:t>
+            </a:r>
+            <a:r>
+              <a:rPr lang="es-MX" b="1" dirty="0"/>
+              <a:t>NOMBRE_DOMINIO </a:t>
+            </a:r>
+          </a:p>
+          <a:p>
+            <a:pPr marL="342900" indent="-342900" algn="just" fontAlgn="base">
+              <a:lnSpc>
+                <a:spcPts val="2500"/>
+              </a:lnSpc>
+              <a:buFont typeface="+mj-lt"/>
+              <a:buAutoNum type="arabicPeriod"/>
+            </a:pPr>
+            <a:r>
+              <a:rPr lang="es-MX" dirty="0"/>
+              <a:t>Generar claves RSA criptográficas </a:t>
+            </a:r>
+          </a:p>
+          <a:p>
+            <a:pPr lvl="1" algn="just" fontAlgn="base">
+              <a:lnSpc>
+                <a:spcPts val="2500"/>
+              </a:lnSpc>
+              <a:spcAft>
+                <a:spcPts val="600"/>
+              </a:spcAft>
+            </a:pPr>
+            <a:r>
+              <a:rPr lang="es-MX" b="1" dirty="0" err="1">
+                <a:solidFill>
+                  <a:schemeClr val="accent6">
+                    <a:lumMod val="75000"/>
+                  </a:schemeClr>
+                </a:solidFill>
+              </a:rPr>
+              <a:t>crypto</a:t>
+            </a:r>
+            <a:r>
+              <a:rPr lang="es-MX" b="1" dirty="0">
+                <a:solidFill>
+                  <a:schemeClr val="accent6">
+                    <a:lumMod val="75000"/>
+                  </a:schemeClr>
+                </a:solidFill>
+              </a:rPr>
+              <a:t> </a:t>
+            </a:r>
+            <a:r>
+              <a:rPr lang="es-MX" b="1" dirty="0" err="1">
+                <a:solidFill>
+                  <a:schemeClr val="accent6">
+                    <a:lumMod val="75000"/>
+                  </a:schemeClr>
+                </a:solidFill>
+              </a:rPr>
+              <a:t>key</a:t>
+            </a:r>
+            <a:r>
+              <a:rPr lang="es-MX" b="1" dirty="0">
+                <a:solidFill>
+                  <a:schemeClr val="accent6">
+                    <a:lumMod val="75000"/>
+                  </a:schemeClr>
+                </a:solidFill>
+              </a:rPr>
+              <a:t> </a:t>
+            </a:r>
+            <a:r>
+              <a:rPr lang="es-MX" b="1" dirty="0" err="1">
+                <a:solidFill>
+                  <a:schemeClr val="accent6">
+                    <a:lumMod val="75000"/>
+                  </a:schemeClr>
+                </a:solidFill>
+              </a:rPr>
+              <a:t>generate</a:t>
+            </a:r>
+            <a:r>
+              <a:rPr lang="es-MX" b="1" dirty="0">
+                <a:solidFill>
+                  <a:schemeClr val="accent6">
+                    <a:lumMod val="75000"/>
+                  </a:schemeClr>
+                </a:solidFill>
+              </a:rPr>
+              <a:t> </a:t>
+            </a:r>
+            <a:r>
+              <a:rPr lang="es-MX" b="1" dirty="0" err="1">
+                <a:solidFill>
+                  <a:schemeClr val="accent6">
+                    <a:lumMod val="75000"/>
+                  </a:schemeClr>
+                </a:solidFill>
+              </a:rPr>
+              <a:t>rsa</a:t>
+            </a:r>
+            <a:r>
+              <a:rPr lang="es-MX" b="1" dirty="0">
+                <a:solidFill>
+                  <a:schemeClr val="accent6">
+                    <a:lumMod val="75000"/>
+                  </a:schemeClr>
+                </a:solidFill>
+              </a:rPr>
+              <a:t> </a:t>
+            </a:r>
+          </a:p>
+          <a:p>
+            <a:pPr marL="342900" indent="-342900" algn="just" fontAlgn="base">
+              <a:lnSpc>
+                <a:spcPts val="2500"/>
+              </a:lnSpc>
+              <a:buFont typeface="+mj-lt"/>
+              <a:buAutoNum type="arabicPeriod"/>
+            </a:pPr>
+            <a:r>
+              <a:rPr lang="es-MX" dirty="0"/>
+              <a:t>Crear un usuario local para la autenticación </a:t>
+            </a:r>
+          </a:p>
+          <a:p>
+            <a:pPr lvl="1" algn="just" fontAlgn="base">
+              <a:lnSpc>
+                <a:spcPts val="2500"/>
+              </a:lnSpc>
+              <a:spcAft>
+                <a:spcPts val="600"/>
+              </a:spcAft>
+            </a:pPr>
+            <a:r>
+              <a:rPr lang="es-MX" b="1" dirty="0" err="1">
+                <a:solidFill>
+                  <a:schemeClr val="accent6">
+                    <a:lumMod val="75000"/>
+                  </a:schemeClr>
+                </a:solidFill>
+              </a:rPr>
+              <a:t>username</a:t>
+            </a:r>
+            <a:r>
+              <a:rPr lang="es-MX" b="1" dirty="0"/>
+              <a:t> NOMBRE_USUARIO </a:t>
+            </a:r>
+            <a:r>
+              <a:rPr lang="es-MX" b="1" dirty="0" err="1">
+                <a:solidFill>
+                  <a:schemeClr val="accent6">
+                    <a:lumMod val="75000"/>
+                  </a:schemeClr>
+                </a:solidFill>
+              </a:rPr>
+              <a:t>secret</a:t>
+            </a:r>
+            <a:r>
+              <a:rPr lang="es-MX" b="1" dirty="0"/>
+              <a:t> CONTRASENA_SEGURA</a:t>
+            </a:r>
+          </a:p>
+          <a:p>
+            <a:pPr marL="342900" indent="-342900" algn="just" fontAlgn="base">
+              <a:lnSpc>
+                <a:spcPts val="2500"/>
+              </a:lnSpc>
+              <a:buFont typeface="+mj-lt"/>
+              <a:buAutoNum type="arabicPeriod"/>
+            </a:pPr>
+            <a:r>
+              <a:rPr lang="es-MX" dirty="0"/>
+              <a:t>Configurar las líneas VTY para permitir solo SSH </a:t>
+            </a:r>
+          </a:p>
+          <a:p>
+            <a:pPr lvl="1" algn="just" fontAlgn="base">
+              <a:lnSpc>
+                <a:spcPts val="2500"/>
+              </a:lnSpc>
+            </a:pPr>
+            <a:r>
+              <a:rPr lang="es-MX" b="1" dirty="0">
+                <a:solidFill>
+                  <a:schemeClr val="accent6">
+                    <a:lumMod val="75000"/>
+                  </a:schemeClr>
+                </a:solidFill>
+              </a:rPr>
+              <a:t>line </a:t>
+            </a:r>
+            <a:r>
+              <a:rPr lang="es-MX" b="1" dirty="0" err="1">
+                <a:solidFill>
+                  <a:schemeClr val="accent6">
+                    <a:lumMod val="75000"/>
+                  </a:schemeClr>
+                </a:solidFill>
+              </a:rPr>
+              <a:t>vty</a:t>
+            </a:r>
+            <a:r>
+              <a:rPr lang="es-MX" b="1" dirty="0">
+                <a:solidFill>
+                  <a:schemeClr val="accent6">
+                    <a:lumMod val="75000"/>
+                  </a:schemeClr>
+                </a:solidFill>
+              </a:rPr>
+              <a:t> 0 15 </a:t>
+            </a:r>
+          </a:p>
+          <a:p>
+            <a:pPr lvl="1" algn="just" fontAlgn="base">
+              <a:lnSpc>
+                <a:spcPts val="2500"/>
+              </a:lnSpc>
+            </a:pPr>
+            <a:r>
+              <a:rPr lang="es-MX" b="1" dirty="0" err="1">
+                <a:solidFill>
+                  <a:schemeClr val="accent6">
+                    <a:lumMod val="75000"/>
+                  </a:schemeClr>
+                </a:solidFill>
+              </a:rPr>
+              <a:t>login</a:t>
+            </a:r>
+            <a:r>
+              <a:rPr lang="es-MX" b="1" dirty="0">
+                <a:solidFill>
+                  <a:schemeClr val="accent6">
+                    <a:lumMod val="75000"/>
+                  </a:schemeClr>
+                </a:solidFill>
+              </a:rPr>
+              <a:t> local </a:t>
+            </a:r>
+            <a:r>
+              <a:rPr lang="es-MX" b="1" dirty="0" err="1">
+                <a:solidFill>
+                  <a:schemeClr val="accent6">
+                    <a:lumMod val="75000"/>
+                  </a:schemeClr>
+                </a:solidFill>
+              </a:rPr>
+              <a:t>transport</a:t>
+            </a:r>
+            <a:r>
+              <a:rPr lang="es-MX" b="1" dirty="0">
+                <a:solidFill>
+                  <a:schemeClr val="accent6">
+                    <a:lumMod val="75000"/>
+                  </a:schemeClr>
+                </a:solidFill>
+              </a:rPr>
+              <a:t> </a:t>
+            </a:r>
+          </a:p>
+          <a:p>
+            <a:pPr lvl="1" algn="just" fontAlgn="base">
+              <a:lnSpc>
+                <a:spcPts val="2500"/>
+              </a:lnSpc>
+            </a:pPr>
+            <a:r>
+              <a:rPr lang="es-MX" b="1" dirty="0">
+                <a:solidFill>
+                  <a:schemeClr val="accent6">
+                    <a:lumMod val="75000"/>
+                  </a:schemeClr>
+                </a:solidFill>
+              </a:rPr>
+              <a:t>input </a:t>
+            </a:r>
+            <a:r>
+              <a:rPr lang="es-MX" b="1" dirty="0" err="1">
+                <a:solidFill>
+                  <a:schemeClr val="accent6">
+                    <a:lumMod val="75000"/>
+                  </a:schemeClr>
+                </a:solidFill>
+              </a:rPr>
+              <a:t>ssh</a:t>
+            </a:r>
+            <a:endParaRPr lang="es-ES" b="1" dirty="0">
+              <a:solidFill>
+                <a:schemeClr val="accent6">
+                  <a:lumMod val="75000"/>
+                </a:schemeClr>
+              </a:solidFill>
+              <a:effectLst/>
+              <a:cs typeface="Arial" panose="020B0604020202020204" pitchFamily="34" charset="0"/>
+            </a:endParaRPr>
+          </a:p>
+        </p:txBody>
+      </p:sp>
+    </p:spTree>
+    <p:extLst>
+      <p:ext uri="{BB962C8B-B14F-4D97-AF65-F5344CB8AC3E}">
+        <p14:creationId xmlns:p14="http://schemas.microsoft.com/office/powerpoint/2010/main" val="1751793460"/>
       </p:ext>
     </p:extLst>
   </p:cSld>

--- a/Calendario2026/Presentaciones/14_SSH.pptx
+++ b/Calendario2026/Presentaciones/14_SSH.pptx
@@ -5,7 +5,7 @@
     <p:sldMasterId id="2147483648" r:id="rId1"/>
   </p:sldMasterIdLst>
   <p:notesMasterIdLst>
-    <p:notesMasterId r:id="rId9"/>
+    <p:notesMasterId r:id="rId10"/>
   </p:notesMasterIdLst>
   <p:sldIdLst>
     <p:sldId id="257" r:id="rId2"/>
@@ -15,6 +15,7 @@
     <p:sldId id="325" r:id="rId6"/>
     <p:sldId id="326" r:id="rId7"/>
     <p:sldId id="327" r:id="rId8"/>
+    <p:sldId id="328" r:id="rId9"/>
   </p:sldIdLst>
   <p:sldSz cx="9144000" cy="6858000" type="screen4x3"/>
   <p:notesSz cx="6858000" cy="9144000"/>
@@ -132,29 +133,45 @@
 </p:presentation>
 </file>
 
+<file path=ppt/revisionInfo.xml><?xml version="1.0" encoding="utf-8"?>
+<p1510:revInfo xmlns:a="http://schemas.openxmlformats.org/drawingml/2006/main" xmlns:r="http://schemas.openxmlformats.org/officeDocument/2006/relationships" xmlns:p1510="http://schemas.microsoft.com/office/powerpoint/2015/10/main">
+  <p1510:revLst>
+    <p1510:client id="{8644EC16-9916-4C09-8025-9976B3A89EC8}" v="4" dt="2026-06-01T18:41:43.986"/>
+  </p1510:revLst>
+</p1510:revInfo>
+</file>
+
 <file path=ppt/changesInfos/changesInfo1.xml><?xml version="1.0" encoding="utf-8"?>
 <pc:chgInfo xmlns:a="http://schemas.openxmlformats.org/drawingml/2006/main" xmlns:r="http://schemas.openxmlformats.org/officeDocument/2006/relationships" xmlns:ac="http://schemas.microsoft.com/office/drawing/2013/main/command" xmlns:pc="http://schemas.microsoft.com/office/powerpoint/2013/main/command">
   <pc:docChgLst>
     <pc:chgData name="Lizethe Pérez Fuertes" userId="4ae9ef87-2a7d-42f8-8dfa-0a501a9e2ff4" providerId="ADAL" clId="{FDDD45CB-1330-4033-A842-3D2746AFF7C7}"/>
-    <pc:docChg chg="undo custSel modSld">
-      <pc:chgData name="Lizethe Pérez Fuertes" userId="4ae9ef87-2a7d-42f8-8dfa-0a501a9e2ff4" providerId="ADAL" clId="{FDDD45CB-1330-4033-A842-3D2746AFF7C7}" dt="2026-03-02T20:55:42.908" v="6" actId="6549"/>
+    <pc:docChg chg="undo custSel addSld modSld">
+      <pc:chgData name="Lizethe Pérez Fuertes" userId="4ae9ef87-2a7d-42f8-8dfa-0a501a9e2ff4" providerId="ADAL" clId="{FDDD45CB-1330-4033-A842-3D2746AFF7C7}" dt="2026-06-01T18:42:24.485" v="24" actId="1076"/>
       <pc:docMkLst>
         <pc:docMk/>
       </pc:docMkLst>
-      <pc:sldChg chg="modSp mod">
-        <pc:chgData name="Lizethe Pérez Fuertes" userId="4ae9ef87-2a7d-42f8-8dfa-0a501a9e2ff4" providerId="ADAL" clId="{FDDD45CB-1330-4033-A842-3D2746AFF7C7}" dt="2026-03-02T20:55:42.908" v="6" actId="6549"/>
+      <pc:sldChg chg="delSp modSp add mod">
+        <pc:chgData name="Lizethe Pérez Fuertes" userId="4ae9ef87-2a7d-42f8-8dfa-0a501a9e2ff4" providerId="ADAL" clId="{FDDD45CB-1330-4033-A842-3D2746AFF7C7}" dt="2026-06-01T18:42:24.485" v="24" actId="1076"/>
         <pc:sldMkLst>
           <pc:docMk/>
-          <pc:sldMk cId="1751793460" sldId="327"/>
+          <pc:sldMk cId="3330763678" sldId="328"/>
         </pc:sldMkLst>
         <pc:spChg chg="mod">
-          <ac:chgData name="Lizethe Pérez Fuertes" userId="4ae9ef87-2a7d-42f8-8dfa-0a501a9e2ff4" providerId="ADAL" clId="{FDDD45CB-1330-4033-A842-3D2746AFF7C7}" dt="2026-03-02T20:55:42.908" v="6" actId="6549"/>
+          <ac:chgData name="Lizethe Pérez Fuertes" userId="4ae9ef87-2a7d-42f8-8dfa-0a501a9e2ff4" providerId="ADAL" clId="{FDDD45CB-1330-4033-A842-3D2746AFF7C7}" dt="2026-06-01T18:42:24.485" v="24" actId="1076"/>
           <ac:spMkLst>
             <pc:docMk/>
-            <pc:sldMk cId="1751793460" sldId="327"/>
-            <ac:spMk id="8" creationId="{A3A4593B-5ECA-9D8B-73D2-5050A77BF01B}"/>
+            <pc:sldMk cId="3330763678" sldId="328"/>
+            <ac:spMk id="8" creationId="{D9896FC8-B10F-36A8-249A-EE6B52E85936}"/>
           </ac:spMkLst>
         </pc:spChg>
+        <pc:picChg chg="del">
+          <ac:chgData name="Lizethe Pérez Fuertes" userId="4ae9ef87-2a7d-42f8-8dfa-0a501a9e2ff4" providerId="ADAL" clId="{FDDD45CB-1330-4033-A842-3D2746AFF7C7}" dt="2026-06-01T18:40:42.706" v="10" actId="478"/>
+          <ac:picMkLst>
+            <pc:docMk/>
+            <pc:sldMk cId="3330763678" sldId="328"/>
+            <ac:picMk id="4" creationId="{59D7176C-F49B-E474-5E9C-2581935D5E50}"/>
+          </ac:picMkLst>
+        </pc:picChg>
       </pc:sldChg>
     </pc:docChg>
   </pc:docChgLst>
@@ -243,7 +260,7 @@
           <a:p>
             <a:fld id="{2D445F07-8756-451B-A938-0248325FC7BB}" type="datetimeFigureOut">
               <a:rPr lang="es-MX" smtClean="0"/>
-              <a:t>02/03/2026</a:t>
+              <a:t>01/06/2026</a:t>
             </a:fld>
             <a:endParaRPr lang="es-MX" dirty="0"/>
           </a:p>
@@ -908,6 +925,69 @@
 </p:notes>
 </file>
 
+<file path=ppt/notesSlides/notesSlide8.xml><?xml version="1.0" encoding="utf-8"?>
+<p:notes xmlns:a="http://schemas.openxmlformats.org/drawingml/2006/main" xmlns:r="http://schemas.openxmlformats.org/officeDocument/2006/relationships" xmlns:p="http://schemas.openxmlformats.org/presentationml/2006/main">
+  <p:cSld>
+    <p:spTree>
+      <p:nvGrpSpPr>
+        <p:cNvPr id="1" name="">
+          <a:extLst>
+            <a:ext uri="{FF2B5EF4-FFF2-40B4-BE49-F238E27FC236}">
+              <a16:creationId xmlns:a16="http://schemas.microsoft.com/office/drawing/2014/main" id="{3B1F4749-00DE-D912-1660-3106A2EACF47}"/>
+            </a:ext>
+          </a:extLst>
+        </p:cNvPr>
+        <p:cNvGrpSpPr/>
+        <p:nvPr/>
+      </p:nvGrpSpPr>
+      <p:grpSpPr>
+        <a:xfrm>
+          <a:off x="0" y="0"/>
+          <a:ext cx="0" cy="0"/>
+          <a:chOff x="0" y="0"/>
+          <a:chExt cx="0" cy="0"/>
+        </a:xfrm>
+      </p:grpSpPr>
+      <p:sp>
+        <p:nvSpPr>
+          <p:cNvPr id="2" name="Notes Placeholder">
+            <a:extLst>
+              <a:ext uri="{FF2B5EF4-FFF2-40B4-BE49-F238E27FC236}">
+                <a16:creationId xmlns:a16="http://schemas.microsoft.com/office/drawing/2014/main" id="{663554E5-F9B3-0344-C5BD-71CAEFA1ABF9}"/>
+              </a:ext>
+            </a:extLst>
+          </p:cNvPr>
+          <p:cNvSpPr>
+            <a:spLocks noGrp="1"/>
+          </p:cNvSpPr>
+          <p:nvPr>
+            <p:ph type="body" idx="1"/>
+          </p:nvPr>
+        </p:nvSpPr>
+        <p:spPr/>
+        <p:txBody>
+          <a:bodyPr>
+            <a:normAutofit/>
+          </a:bodyPr>
+          <a:lstStyle/>
+          <a:p>
+            <a:endParaRPr/>
+          </a:p>
+        </p:txBody>
+      </p:sp>
+    </p:spTree>
+    <p:extLst>
+      <p:ext uri="{BB962C8B-B14F-4D97-AF65-F5344CB8AC3E}">
+        <p14:creationId xmlns:p14="http://schemas.microsoft.com/office/powerpoint/2010/main" val="3395077406"/>
+      </p:ext>
+    </p:extLst>
+  </p:cSld>
+  <p:clrMapOvr>
+    <a:masterClrMapping/>
+  </p:clrMapOvr>
+</p:notes>
+</file>
+
 <file path=ppt/slideLayouts/slideLayout1.xml><?xml version="1.0" encoding="utf-8"?>
 <p:sldLayout xmlns:a="http://schemas.openxmlformats.org/drawingml/2006/main" xmlns:r="http://schemas.openxmlformats.org/officeDocument/2006/relationships" xmlns:p="http://schemas.openxmlformats.org/presentationml/2006/main" type="title" preserve="1">
   <p:cSld name="Diapositiva de título">
@@ -1089,7 +1169,7 @@
           <a:p>
             <a:fld id="{5E75A0DC-66C6-4CEC-A5EB-F8C97CEC3796}" type="datetimeFigureOut">
               <a:rPr lang="es-MX" smtClean="0"/>
-              <a:t>02/03/2026</a:t>
+              <a:t>01/06/2026</a:t>
             </a:fld>
             <a:endParaRPr lang="es-MX" dirty="0"/>
           </a:p>
@@ -1259,7 +1339,7 @@
           <a:p>
             <a:fld id="{5E75A0DC-66C6-4CEC-A5EB-F8C97CEC3796}" type="datetimeFigureOut">
               <a:rPr lang="es-MX" smtClean="0"/>
-              <a:t>02/03/2026</a:t>
+              <a:t>01/06/2026</a:t>
             </a:fld>
             <a:endParaRPr lang="es-MX" dirty="0"/>
           </a:p>
@@ -1439,7 +1519,7 @@
           <a:p>
             <a:fld id="{5E75A0DC-66C6-4CEC-A5EB-F8C97CEC3796}" type="datetimeFigureOut">
               <a:rPr lang="es-MX" smtClean="0"/>
-              <a:t>02/03/2026</a:t>
+              <a:t>01/06/2026</a:t>
             </a:fld>
             <a:endParaRPr lang="es-MX" dirty="0"/>
           </a:p>
@@ -1573,7 +1653,7 @@
           <a:p>
             <a:fld id="{1D8BD707-D9CF-40AE-B4C6-C98DA3205C09}" type="datetimeFigureOut">
               <a:rPr lang="en-US"/>
-              <a:t>3/2/2026</a:t>
+              <a:t>6/1/2026</a:t>
             </a:fld>
             <a:endParaRPr lang="en-US"/>
           </a:p>
@@ -1733,7 +1813,7 @@
           <a:p>
             <a:fld id="{5E75A0DC-66C6-4CEC-A5EB-F8C97CEC3796}" type="datetimeFigureOut">
               <a:rPr lang="es-MX" smtClean="0"/>
-              <a:t>02/03/2026</a:t>
+              <a:t>01/06/2026</a:t>
             </a:fld>
             <a:endParaRPr lang="es-MX" dirty="0"/>
           </a:p>
@@ -1979,7 +2059,7 @@
           <a:p>
             <a:fld id="{5E75A0DC-66C6-4CEC-A5EB-F8C97CEC3796}" type="datetimeFigureOut">
               <a:rPr lang="es-MX" smtClean="0"/>
-              <a:t>02/03/2026</a:t>
+              <a:t>01/06/2026</a:t>
             </a:fld>
             <a:endParaRPr lang="es-MX" dirty="0"/>
           </a:p>
@@ -2267,7 +2347,7 @@
           <a:p>
             <a:fld id="{5E75A0DC-66C6-4CEC-A5EB-F8C97CEC3796}" type="datetimeFigureOut">
               <a:rPr lang="es-MX" smtClean="0"/>
-              <a:t>02/03/2026</a:t>
+              <a:t>01/06/2026</a:t>
             </a:fld>
             <a:endParaRPr lang="es-MX" dirty="0"/>
           </a:p>
@@ -2689,7 +2769,7 @@
           <a:p>
             <a:fld id="{5E75A0DC-66C6-4CEC-A5EB-F8C97CEC3796}" type="datetimeFigureOut">
               <a:rPr lang="es-MX" smtClean="0"/>
-              <a:t>02/03/2026</a:t>
+              <a:t>01/06/2026</a:t>
             </a:fld>
             <a:endParaRPr lang="es-MX" dirty="0"/>
           </a:p>
@@ -2807,7 +2887,7 @@
           <a:p>
             <a:fld id="{5E75A0DC-66C6-4CEC-A5EB-F8C97CEC3796}" type="datetimeFigureOut">
               <a:rPr lang="es-MX" smtClean="0"/>
-              <a:t>02/03/2026</a:t>
+              <a:t>01/06/2026</a:t>
             </a:fld>
             <a:endParaRPr lang="es-MX" dirty="0"/>
           </a:p>
@@ -2902,7 +2982,7 @@
           <a:p>
             <a:fld id="{5E75A0DC-66C6-4CEC-A5EB-F8C97CEC3796}" type="datetimeFigureOut">
               <a:rPr lang="es-MX" smtClean="0"/>
-              <a:t>02/03/2026</a:t>
+              <a:t>01/06/2026</a:t>
             </a:fld>
             <a:endParaRPr lang="es-MX" dirty="0"/>
           </a:p>
@@ -3179,7 +3259,7 @@
           <a:p>
             <a:fld id="{5E75A0DC-66C6-4CEC-A5EB-F8C97CEC3796}" type="datetimeFigureOut">
               <a:rPr lang="es-MX" smtClean="0"/>
-              <a:t>02/03/2026</a:t>
+              <a:t>01/06/2026</a:t>
             </a:fld>
             <a:endParaRPr lang="es-MX" dirty="0"/>
           </a:p>
@@ -3432,7 +3512,7 @@
           <a:p>
             <a:fld id="{5E75A0DC-66C6-4CEC-A5EB-F8C97CEC3796}" type="datetimeFigureOut">
               <a:rPr lang="es-MX" smtClean="0"/>
-              <a:t>02/03/2026</a:t>
+              <a:t>01/06/2026</a:t>
             </a:fld>
             <a:endParaRPr lang="es-MX" dirty="0"/>
           </a:p>
@@ -3645,7 +3725,7 @@
           <a:p>
             <a:fld id="{5E75A0DC-66C6-4CEC-A5EB-F8C97CEC3796}" type="datetimeFigureOut">
               <a:rPr lang="es-MX" smtClean="0"/>
-              <a:t>02/03/2026</a:t>
+              <a:t>01/06/2026</a:t>
             </a:fld>
             <a:endParaRPr lang="es-MX" dirty="0"/>
           </a:p>
@@ -6425,6 +6505,561 @@
     <p:extLst>
       <p:ext uri="{BB962C8B-B14F-4D97-AF65-F5344CB8AC3E}">
         <p14:creationId xmlns:p14="http://schemas.microsoft.com/office/powerpoint/2010/main" val="1751793460"/>
+      </p:ext>
+    </p:extLst>
+  </p:cSld>
+  <p:clrMapOvr>
+    <a:masterClrMapping/>
+  </p:clrMapOvr>
+</p:sld>
+</file>
+
+<file path=ppt/slides/slide8.xml><?xml version="1.0" encoding="utf-8"?>
+<p:sld xmlns:a="http://schemas.openxmlformats.org/drawingml/2006/main" xmlns:r="http://schemas.openxmlformats.org/officeDocument/2006/relationships" xmlns:p="http://schemas.openxmlformats.org/presentationml/2006/main">
+  <p:cSld>
+    <p:spTree>
+      <p:nvGrpSpPr>
+        <p:cNvPr id="1" name="">
+          <a:extLst>
+            <a:ext uri="{FF2B5EF4-FFF2-40B4-BE49-F238E27FC236}">
+              <a16:creationId xmlns:a16="http://schemas.microsoft.com/office/drawing/2014/main" id="{4B6CBF20-4F5A-C5B0-2AF1-6222DA61055D}"/>
+            </a:ext>
+          </a:extLst>
+        </p:cNvPr>
+        <p:cNvGrpSpPr/>
+        <p:nvPr/>
+      </p:nvGrpSpPr>
+      <p:grpSpPr>
+        <a:xfrm>
+          <a:off x="0" y="0"/>
+          <a:ext cx="0" cy="0"/>
+          <a:chOff x="0" y="0"/>
+          <a:chExt cx="0" cy="0"/>
+        </a:xfrm>
+      </p:grpSpPr>
+      <p:sp>
+        <p:nvSpPr>
+          <p:cNvPr id="21" name="Rectangle 2">
+            <a:extLst>
+              <a:ext uri="{FF2B5EF4-FFF2-40B4-BE49-F238E27FC236}">
+                <a16:creationId xmlns:a16="http://schemas.microsoft.com/office/drawing/2014/main" id="{585F46E6-7D7C-F3EA-C1F1-358DA95A7884}"/>
+              </a:ext>
+            </a:extLst>
+          </p:cNvPr>
+          <p:cNvSpPr txBox="1">
+            <a:spLocks noChangeArrowheads="1"/>
+          </p:cNvSpPr>
+          <p:nvPr/>
+        </p:nvSpPr>
+        <p:spPr>
+          <a:xfrm>
+            <a:off x="18298" y="125760"/>
+            <a:ext cx="8964488" cy="1143000"/>
+          </a:xfrm>
+          <a:prstGeom prst="rect">
+            <a:avLst/>
+          </a:prstGeom>
+          <a:solidFill>
+            <a:schemeClr val="bg1"/>
+          </a:solidFill>
+        </p:spPr>
+        <p:txBody>
+          <a:bodyPr vert="horz" lIns="92075" tIns="46038" rIns="92075" bIns="46038" rtlCol="0" anchor="ctr">
+            <a:noAutofit/>
+          </a:bodyPr>
+          <a:lstStyle>
+            <a:lvl1pPr algn="ctr" defTabSz="914400" rtl="0" eaLnBrk="1" latinLnBrk="0" hangingPunct="1">
+              <a:spcBef>
+                <a:spcPct val="0"/>
+              </a:spcBef>
+              <a:buNone/>
+              <a:defRPr sz="4400" kern="1200">
+                <a:solidFill>
+                  <a:schemeClr val="tx1"/>
+                </a:solidFill>
+                <a:latin typeface="+mj-lt"/>
+                <a:ea typeface="+mj-ea"/>
+                <a:cs typeface="+mj-cs"/>
+              </a:defRPr>
+            </a:lvl1pPr>
+          </a:lstStyle>
+          <a:p>
+            <a:pPr>
+              <a:defRPr/>
+            </a:pPr>
+            <a:r>
+              <a:rPr lang="es-ES_tradnl" sz="3200" dirty="0">
+                <a:solidFill>
+                  <a:srgbClr val="3333CC"/>
+                </a:solidFill>
+                <a:effectLst>
+                  <a:outerShdw blurRad="38100" dist="38100" dir="2700000" algn="tl">
+                    <a:srgbClr val="C0C0C0"/>
+                  </a:outerShdw>
+                </a:effectLst>
+                <a:latin typeface="Dom Casual" charset="0"/>
+              </a:rPr>
+              <a:t> </a:t>
+            </a:r>
+            <a:r>
+              <a:rPr lang="es-ES_tradnl" sz="3200" b="1" dirty="0">
+                <a:solidFill>
+                  <a:schemeClr val="accent4">
+                    <a:lumMod val="50000"/>
+                  </a:schemeClr>
+                </a:solidFill>
+                <a:effectLst>
+                  <a:outerShdw blurRad="38100" dist="38100" dir="2700000" algn="tl">
+                    <a:srgbClr val="C0C0C0"/>
+                  </a:outerShdw>
+                </a:effectLst>
+                <a:latin typeface="Dom Casual" charset="0"/>
+              </a:rPr>
+              <a:t>Configuración de SSH para la administración remota</a:t>
+            </a:r>
+            <a:endParaRPr lang="es-ES_tradnl" sz="2400" b="1" dirty="0">
+              <a:solidFill>
+                <a:schemeClr val="accent5">
+                  <a:lumMod val="75000"/>
+                </a:schemeClr>
+              </a:solidFill>
+              <a:effectLst>
+                <a:outerShdw blurRad="38100" dist="38100" dir="2700000" algn="tl">
+                  <a:srgbClr val="C0C0C0"/>
+                </a:outerShdw>
+              </a:effectLst>
+              <a:latin typeface="Dom Casual" charset="0"/>
+            </a:endParaRPr>
+          </a:p>
+        </p:txBody>
+      </p:sp>
+      <p:sp>
+        <p:nvSpPr>
+          <p:cNvPr id="8" name="CuadroTexto 7">
+            <a:extLst>
+              <a:ext uri="{FF2B5EF4-FFF2-40B4-BE49-F238E27FC236}">
+                <a16:creationId xmlns:a16="http://schemas.microsoft.com/office/drawing/2014/main" id="{D9896FC8-B10F-36A8-249A-EE6B52E85936}"/>
+              </a:ext>
+            </a:extLst>
+          </p:cNvPr>
+          <p:cNvSpPr txBox="1"/>
+          <p:nvPr/>
+        </p:nvSpPr>
+        <p:spPr>
+          <a:xfrm>
+            <a:off x="467544" y="1268760"/>
+            <a:ext cx="8352928" cy="5243102"/>
+          </a:xfrm>
+          <a:prstGeom prst="rect">
+            <a:avLst/>
+          </a:prstGeom>
+          <a:noFill/>
+        </p:spPr>
+        <p:txBody>
+          <a:bodyPr wrap="square">
+            <a:spAutoFit/>
+          </a:bodyPr>
+          <a:lstStyle/>
+          <a:p>
+            <a:pPr>
+              <a:lnSpc>
+                <a:spcPts val="2500"/>
+              </a:lnSpc>
+              <a:spcAft>
+                <a:spcPts val="300"/>
+              </a:spcAft>
+            </a:pPr>
+            <a:r>
+              <a:rPr lang="es-MX" b="1" dirty="0">
+                <a:solidFill>
+                  <a:srgbClr val="0070C0"/>
+                </a:solidFill>
+                <a:latin typeface="Arial" panose="020B0604020202020204" pitchFamily="34" charset="0"/>
+                <a:cs typeface="Arial" panose="020B0604020202020204" pitchFamily="34" charset="0"/>
+              </a:rPr>
+              <a:t>¿Cómo proporcionaría acceso a un dispositivo de red a varios usuarios, cada uno con un nombre de usuario diferente?</a:t>
+            </a:r>
+            <a:endParaRPr lang="es-MX" dirty="0">
+              <a:solidFill>
+                <a:srgbClr val="0070C0"/>
+              </a:solidFill>
+              <a:latin typeface="Arial" panose="020B0604020202020204" pitchFamily="34" charset="0"/>
+              <a:cs typeface="Arial" panose="020B0604020202020204" pitchFamily="34" charset="0"/>
+            </a:endParaRPr>
+          </a:p>
+          <a:p>
+            <a:pPr>
+              <a:lnSpc>
+                <a:spcPts val="2500"/>
+              </a:lnSpc>
+            </a:pPr>
+            <a:r>
+              <a:rPr lang="es-MX" dirty="0">
+                <a:latin typeface="Arial" panose="020B0604020202020204" pitchFamily="34" charset="0"/>
+                <a:cs typeface="Arial" panose="020B0604020202020204" pitchFamily="34" charset="0"/>
+              </a:rPr>
+              <a:t>Se agregaría el nombre de usuario y la contraseña de cada usuario a la base de datos local mediante el comando </a:t>
+            </a:r>
+            <a:r>
+              <a:rPr lang="es-MX" b="1" dirty="0" err="1">
+                <a:latin typeface="Arial" panose="020B0604020202020204" pitchFamily="34" charset="0"/>
+                <a:cs typeface="Arial" panose="020B0604020202020204" pitchFamily="34" charset="0"/>
+              </a:rPr>
+              <a:t>username</a:t>
+            </a:r>
+            <a:r>
+              <a:rPr lang="es-MX" dirty="0">
+                <a:latin typeface="Arial" panose="020B0604020202020204" pitchFamily="34" charset="0"/>
+                <a:cs typeface="Arial" panose="020B0604020202020204" pitchFamily="34" charset="0"/>
+              </a:rPr>
+              <a:t>.</a:t>
+            </a:r>
+          </a:p>
+          <a:p>
+            <a:endParaRPr lang="es-MX" sz="1200" dirty="0">
+              <a:latin typeface="Arial" panose="020B0604020202020204" pitchFamily="34" charset="0"/>
+              <a:cs typeface="Arial" panose="020B0604020202020204" pitchFamily="34" charset="0"/>
+            </a:endParaRPr>
+          </a:p>
+          <a:p>
+            <a:pPr>
+              <a:lnSpc>
+                <a:spcPts val="2500"/>
+              </a:lnSpc>
+            </a:pPr>
+            <a:r>
+              <a:rPr lang="en-US" b="1" dirty="0">
+                <a:latin typeface="Arial" panose="020B0604020202020204" pitchFamily="34" charset="0"/>
+                <a:cs typeface="Arial" panose="020B0604020202020204" pitchFamily="34" charset="0"/>
+              </a:rPr>
+              <a:t>username admin </a:t>
+            </a:r>
+            <a:r>
+              <a:rPr lang="en-US" b="1" dirty="0">
+                <a:solidFill>
+                  <a:schemeClr val="accent6">
+                    <a:lumMod val="75000"/>
+                  </a:schemeClr>
+                </a:solidFill>
+                <a:latin typeface="Arial" panose="020B0604020202020204" pitchFamily="34" charset="0"/>
+                <a:cs typeface="Arial" panose="020B0604020202020204" pitchFamily="34" charset="0"/>
+              </a:rPr>
+              <a:t>privilege 15 </a:t>
+            </a:r>
+            <a:r>
+              <a:rPr lang="en-US" b="1" dirty="0">
+                <a:latin typeface="Arial" panose="020B0604020202020204" pitchFamily="34" charset="0"/>
+                <a:cs typeface="Arial" panose="020B0604020202020204" pitchFamily="34" charset="0"/>
+              </a:rPr>
+              <a:t>secret </a:t>
+            </a:r>
+            <a:r>
+              <a:rPr lang="en-US" b="1" dirty="0" err="1">
+                <a:latin typeface="Arial" panose="020B0604020202020204" pitchFamily="34" charset="0"/>
+                <a:cs typeface="Arial" panose="020B0604020202020204" pitchFamily="34" charset="0"/>
+              </a:rPr>
+              <a:t>adminpass</a:t>
+            </a:r>
+            <a:endParaRPr lang="es-MX" dirty="0">
+              <a:latin typeface="Arial" panose="020B0604020202020204" pitchFamily="34" charset="0"/>
+              <a:cs typeface="Arial" panose="020B0604020202020204" pitchFamily="34" charset="0"/>
+            </a:endParaRPr>
+          </a:p>
+          <a:p>
+            <a:pPr>
+              <a:lnSpc>
+                <a:spcPts val="2500"/>
+              </a:lnSpc>
+            </a:pPr>
+            <a:r>
+              <a:rPr lang="en-US" b="1" dirty="0">
+                <a:latin typeface="Arial" panose="020B0604020202020204" pitchFamily="34" charset="0"/>
+                <a:cs typeface="Arial" panose="020B0604020202020204" pitchFamily="34" charset="0"/>
+              </a:rPr>
+              <a:t>username usuario1 </a:t>
+            </a:r>
+            <a:r>
+              <a:rPr lang="en-US" b="1" dirty="0">
+                <a:solidFill>
+                  <a:schemeClr val="accent6">
+                    <a:lumMod val="75000"/>
+                  </a:schemeClr>
+                </a:solidFill>
+                <a:latin typeface="Arial" panose="020B0604020202020204" pitchFamily="34" charset="0"/>
+                <a:cs typeface="Arial" panose="020B0604020202020204" pitchFamily="34" charset="0"/>
+              </a:rPr>
+              <a:t>privilege 1 </a:t>
+            </a:r>
+            <a:r>
+              <a:rPr lang="en-US" b="1" dirty="0">
+                <a:latin typeface="Arial" panose="020B0604020202020204" pitchFamily="34" charset="0"/>
+                <a:cs typeface="Arial" panose="020B0604020202020204" pitchFamily="34" charset="0"/>
+              </a:rPr>
+              <a:t>secret </a:t>
+            </a:r>
+            <a:r>
+              <a:rPr lang="en-US" b="1" dirty="0" err="1">
+                <a:latin typeface="Arial" panose="020B0604020202020204" pitchFamily="34" charset="0"/>
+                <a:cs typeface="Arial" panose="020B0604020202020204" pitchFamily="34" charset="0"/>
+              </a:rPr>
+              <a:t>userpass</a:t>
+            </a:r>
+            <a:endParaRPr lang="es-MX" dirty="0">
+              <a:latin typeface="Arial" panose="020B0604020202020204" pitchFamily="34" charset="0"/>
+              <a:cs typeface="Arial" panose="020B0604020202020204" pitchFamily="34" charset="0"/>
+            </a:endParaRPr>
+          </a:p>
+          <a:p>
+            <a:pPr>
+              <a:lnSpc>
+                <a:spcPts val="2500"/>
+              </a:lnSpc>
+            </a:pPr>
+            <a:r>
+              <a:rPr lang="en-US" b="1" dirty="0">
+                <a:latin typeface="Arial" panose="020B0604020202020204" pitchFamily="34" charset="0"/>
+                <a:cs typeface="Arial" panose="020B0604020202020204" pitchFamily="34" charset="0"/>
+              </a:rPr>
+              <a:t>username usuario2 </a:t>
+            </a:r>
+            <a:r>
+              <a:rPr lang="en-US" b="1" dirty="0">
+                <a:solidFill>
+                  <a:schemeClr val="accent6">
+                    <a:lumMod val="75000"/>
+                  </a:schemeClr>
+                </a:solidFill>
+                <a:latin typeface="Arial" panose="020B0604020202020204" pitchFamily="34" charset="0"/>
+                <a:cs typeface="Arial" panose="020B0604020202020204" pitchFamily="34" charset="0"/>
+              </a:rPr>
+              <a:t>privilege 1 </a:t>
+            </a:r>
+            <a:r>
+              <a:rPr lang="en-US" b="1" dirty="0">
+                <a:latin typeface="Arial" panose="020B0604020202020204" pitchFamily="34" charset="0"/>
+                <a:cs typeface="Arial" panose="020B0604020202020204" pitchFamily="34" charset="0"/>
+              </a:rPr>
+              <a:t>secret </a:t>
+            </a:r>
+            <a:r>
+              <a:rPr lang="en-US" b="1" dirty="0" err="1">
+                <a:latin typeface="Arial" panose="020B0604020202020204" pitchFamily="34" charset="0"/>
+                <a:cs typeface="Arial" panose="020B0604020202020204" pitchFamily="34" charset="0"/>
+              </a:rPr>
+              <a:t>userpass</a:t>
+            </a:r>
+            <a:endParaRPr lang="es-MX" dirty="0">
+              <a:latin typeface="Arial" panose="020B0604020202020204" pitchFamily="34" charset="0"/>
+              <a:cs typeface="Arial" panose="020B0604020202020204" pitchFamily="34" charset="0"/>
+            </a:endParaRPr>
+          </a:p>
+          <a:p>
+            <a:endParaRPr lang="es-MX" sz="800" dirty="0">
+              <a:latin typeface="Arial" panose="020B0604020202020204" pitchFamily="34" charset="0"/>
+              <a:cs typeface="Arial" panose="020B0604020202020204" pitchFamily="34" charset="0"/>
+            </a:endParaRPr>
+          </a:p>
+          <a:p>
+            <a:pPr>
+              <a:lnSpc>
+                <a:spcPts val="2500"/>
+              </a:lnSpc>
+            </a:pPr>
+            <a:r>
+              <a:rPr lang="es-MX" b="1" dirty="0">
+                <a:latin typeface="Arial" panose="020B0604020202020204" pitchFamily="34" charset="0"/>
+                <a:cs typeface="Arial" panose="020B0604020202020204" pitchFamily="34" charset="0"/>
+              </a:rPr>
+              <a:t>Nota:</a:t>
+            </a:r>
+            <a:r>
+              <a:rPr lang="es-MX" dirty="0">
+                <a:latin typeface="Arial" panose="020B0604020202020204" pitchFamily="34" charset="0"/>
+                <a:cs typeface="Arial" panose="020B0604020202020204" pitchFamily="34" charset="0"/>
+              </a:rPr>
+              <a:t> Un nivel de privilegio de </a:t>
+            </a:r>
+            <a:r>
+              <a:rPr lang="es-MX" b="1" dirty="0">
+                <a:latin typeface="Arial" panose="020B0604020202020204" pitchFamily="34" charset="0"/>
+                <a:cs typeface="Arial" panose="020B0604020202020204" pitchFamily="34" charset="0"/>
+              </a:rPr>
+              <a:t>15</a:t>
+            </a:r>
+            <a:r>
+              <a:rPr lang="es-MX" dirty="0">
+                <a:latin typeface="Arial" panose="020B0604020202020204" pitchFamily="34" charset="0"/>
+                <a:cs typeface="Arial" panose="020B0604020202020204" pitchFamily="34" charset="0"/>
+              </a:rPr>
+              <a:t> otorga al usuario derechos de </a:t>
+            </a:r>
+            <a:r>
+              <a:rPr lang="es-MX" b="1" dirty="0">
+                <a:latin typeface="Arial" panose="020B0604020202020204" pitchFamily="34" charset="0"/>
+                <a:cs typeface="Arial" panose="020B0604020202020204" pitchFamily="34" charset="0"/>
+              </a:rPr>
+              <a:t>administrador</a:t>
+            </a:r>
+            <a:r>
+              <a:rPr lang="es-MX" dirty="0">
+                <a:latin typeface="Arial" panose="020B0604020202020204" pitchFamily="34" charset="0"/>
+                <a:cs typeface="Arial" panose="020B0604020202020204" pitchFamily="34" charset="0"/>
+              </a:rPr>
+              <a:t>.</a:t>
+            </a:r>
+          </a:p>
+          <a:p>
+            <a:endParaRPr lang="es-MX" dirty="0">
+              <a:latin typeface="Arial" panose="020B0604020202020204" pitchFamily="34" charset="0"/>
+              <a:cs typeface="Arial" panose="020B0604020202020204" pitchFamily="34" charset="0"/>
+            </a:endParaRPr>
+          </a:p>
+          <a:p>
+            <a:pPr>
+              <a:lnSpc>
+                <a:spcPts val="2500"/>
+              </a:lnSpc>
+            </a:pPr>
+            <a:r>
+              <a:rPr lang="es-MX" dirty="0">
+                <a:latin typeface="Arial" panose="020B0604020202020204" pitchFamily="34" charset="0"/>
+                <a:cs typeface="Arial" panose="020B0604020202020204" pitchFamily="34" charset="0"/>
+              </a:rPr>
+              <a:t>La CLI del Cisco IOS tiene dos niveles de acceso a los comandos:</a:t>
+            </a:r>
+          </a:p>
+          <a:p>
+            <a:pPr marL="285750" lvl="0" indent="-285750">
+              <a:lnSpc>
+                <a:spcPts val="2500"/>
+              </a:lnSpc>
+              <a:buFont typeface="Arial" panose="020B0604020202020204" pitchFamily="34" charset="0"/>
+              <a:buChar char="•"/>
+            </a:pPr>
+            <a:r>
+              <a:rPr lang="es-MX" b="1" dirty="0">
+                <a:solidFill>
+                  <a:schemeClr val="accent6">
+                    <a:lumMod val="75000"/>
+                  </a:schemeClr>
+                </a:solidFill>
+                <a:latin typeface="Arial" panose="020B0604020202020204" pitchFamily="34" charset="0"/>
+                <a:cs typeface="Arial" panose="020B0604020202020204" pitchFamily="34" charset="0"/>
+              </a:rPr>
+              <a:t>Modo EXEC de usuario (nivel de privilegio 1)</a:t>
+            </a:r>
+            <a:r>
+              <a:rPr lang="es-MX" dirty="0">
+                <a:latin typeface="Arial" panose="020B0604020202020204" pitchFamily="34" charset="0"/>
+                <a:cs typeface="Arial" panose="020B0604020202020204" pitchFamily="34" charset="0"/>
+              </a:rPr>
+              <a:t>: proporciona los privilegios de usuario de modo EXEC más bajos y permite que solo estén disponibles los comandos del nivel de usuario en el </a:t>
+            </a:r>
+            <a:r>
+              <a:rPr lang="es-MX" dirty="0" err="1">
+                <a:latin typeface="Arial" panose="020B0604020202020204" pitchFamily="34" charset="0"/>
+                <a:cs typeface="Arial" panose="020B0604020202020204" pitchFamily="34" charset="0"/>
+              </a:rPr>
+              <a:t>prompt</a:t>
+            </a:r>
+            <a:r>
+              <a:rPr lang="es-MX" dirty="0">
+                <a:latin typeface="Arial" panose="020B0604020202020204" pitchFamily="34" charset="0"/>
+                <a:cs typeface="Arial" panose="020B0604020202020204" pitchFamily="34" charset="0"/>
+              </a:rPr>
+              <a:t> </a:t>
+            </a:r>
+            <a:r>
+              <a:rPr lang="es-MX" b="1" dirty="0" err="1">
+                <a:latin typeface="Arial" panose="020B0604020202020204" pitchFamily="34" charset="0"/>
+                <a:cs typeface="Arial" panose="020B0604020202020204" pitchFamily="34" charset="0"/>
+              </a:rPr>
+              <a:t>router</a:t>
+            </a:r>
+            <a:r>
+              <a:rPr lang="es-MX" b="1" dirty="0">
+                <a:latin typeface="Arial" panose="020B0604020202020204" pitchFamily="34" charset="0"/>
+                <a:cs typeface="Arial" panose="020B0604020202020204" pitchFamily="34" charset="0"/>
+              </a:rPr>
+              <a:t>&gt;</a:t>
+            </a:r>
+            <a:r>
+              <a:rPr lang="es-MX" dirty="0">
+                <a:latin typeface="Arial" panose="020B0604020202020204" pitchFamily="34" charset="0"/>
+                <a:cs typeface="Arial" panose="020B0604020202020204" pitchFamily="34" charset="0"/>
+              </a:rPr>
+              <a:t>.</a:t>
+            </a:r>
+          </a:p>
+          <a:p>
+            <a:pPr marL="285750" lvl="0" indent="-285750">
+              <a:lnSpc>
+                <a:spcPts val="2500"/>
+              </a:lnSpc>
+              <a:buFont typeface="Arial" panose="020B0604020202020204" pitchFamily="34" charset="0"/>
+              <a:buChar char="•"/>
+            </a:pPr>
+            <a:r>
+              <a:rPr lang="es-MX" b="1" dirty="0">
+                <a:solidFill>
+                  <a:schemeClr val="accent6">
+                    <a:lumMod val="75000"/>
+                  </a:schemeClr>
+                </a:solidFill>
+                <a:latin typeface="Arial" panose="020B0604020202020204" pitchFamily="34" charset="0"/>
+                <a:cs typeface="Arial" panose="020B0604020202020204" pitchFamily="34" charset="0"/>
+              </a:rPr>
+              <a:t>Modo EXEC privilegiado (nivel de privilegio 15)</a:t>
+            </a:r>
+            <a:r>
+              <a:rPr lang="es-MX" dirty="0">
+                <a:latin typeface="Arial" panose="020B0604020202020204" pitchFamily="34" charset="0"/>
+                <a:cs typeface="Arial" panose="020B0604020202020204" pitchFamily="34" charset="0"/>
+              </a:rPr>
+              <a:t>: incluye todos los comandos de nivel de privilegiado en el </a:t>
+            </a:r>
+            <a:r>
+              <a:rPr lang="es-MX" dirty="0" err="1">
+                <a:latin typeface="Arial" panose="020B0604020202020204" pitchFamily="34" charset="0"/>
+                <a:cs typeface="Arial" panose="020B0604020202020204" pitchFamily="34" charset="0"/>
+              </a:rPr>
+              <a:t>prompt</a:t>
+            </a:r>
+            <a:r>
+              <a:rPr lang="es-MX" dirty="0">
+                <a:latin typeface="Arial" panose="020B0604020202020204" pitchFamily="34" charset="0"/>
+                <a:cs typeface="Arial" panose="020B0604020202020204" pitchFamily="34" charset="0"/>
+              </a:rPr>
+              <a:t> </a:t>
+            </a:r>
+            <a:r>
+              <a:rPr lang="es-MX" b="1" dirty="0" err="1">
+                <a:latin typeface="Arial" panose="020B0604020202020204" pitchFamily="34" charset="0"/>
+                <a:cs typeface="Arial" panose="020B0604020202020204" pitchFamily="34" charset="0"/>
+              </a:rPr>
+              <a:t>router</a:t>
+            </a:r>
+            <a:r>
+              <a:rPr lang="es-MX" b="1" dirty="0">
+                <a:latin typeface="Arial" panose="020B0604020202020204" pitchFamily="34" charset="0"/>
+                <a:cs typeface="Arial" panose="020B0604020202020204" pitchFamily="34" charset="0"/>
+              </a:rPr>
+              <a:t>#</a:t>
+            </a:r>
+            <a:r>
+              <a:rPr lang="es-MX" dirty="0">
+                <a:latin typeface="Arial" panose="020B0604020202020204" pitchFamily="34" charset="0"/>
+                <a:cs typeface="Arial" panose="020B0604020202020204" pitchFamily="34" charset="0"/>
+              </a:rPr>
+              <a:t>.</a:t>
+            </a:r>
+          </a:p>
+        </p:txBody>
+      </p:sp>
+    </p:spTree>
+    <p:extLst>
+      <p:ext uri="{BB962C8B-B14F-4D97-AF65-F5344CB8AC3E}">
+        <p14:creationId xmlns:p14="http://schemas.microsoft.com/office/powerpoint/2010/main" val="3330763678"/>
       </p:ext>
     </p:extLst>
   </p:cSld>

--- a/Calendario2026/Presentaciones/14_SSH.pptx
+++ b/Calendario2026/Presentaciones/14_SSH.pptx
@@ -146,18 +146,18 @@
   <pc:docChgLst>
     <pc:chgData name="Lizethe Pérez Fuertes" userId="4ae9ef87-2a7d-42f8-8dfa-0a501a9e2ff4" providerId="ADAL" clId="{FDDD45CB-1330-4033-A842-3D2746AFF7C7}"/>
     <pc:docChg chg="undo custSel addSld modSld">
-      <pc:chgData name="Lizethe Pérez Fuertes" userId="4ae9ef87-2a7d-42f8-8dfa-0a501a9e2ff4" providerId="ADAL" clId="{FDDD45CB-1330-4033-A842-3D2746AFF7C7}" dt="2026-06-01T18:42:24.485" v="24" actId="1076"/>
+      <pc:chgData name="Lizethe Pérez Fuertes" userId="4ae9ef87-2a7d-42f8-8dfa-0a501a9e2ff4" providerId="ADAL" clId="{FDDD45CB-1330-4033-A842-3D2746AFF7C7}" dt="2026-06-02T01:23:47.374" v="26" actId="255"/>
       <pc:docMkLst>
         <pc:docMk/>
       </pc:docMkLst>
       <pc:sldChg chg="delSp modSp add mod">
-        <pc:chgData name="Lizethe Pérez Fuertes" userId="4ae9ef87-2a7d-42f8-8dfa-0a501a9e2ff4" providerId="ADAL" clId="{FDDD45CB-1330-4033-A842-3D2746AFF7C7}" dt="2026-06-01T18:42:24.485" v="24" actId="1076"/>
+        <pc:chgData name="Lizethe Pérez Fuertes" userId="4ae9ef87-2a7d-42f8-8dfa-0a501a9e2ff4" providerId="ADAL" clId="{FDDD45CB-1330-4033-A842-3D2746AFF7C7}" dt="2026-06-02T01:23:47.374" v="26" actId="255"/>
         <pc:sldMkLst>
           <pc:docMk/>
           <pc:sldMk cId="3330763678" sldId="328"/>
         </pc:sldMkLst>
         <pc:spChg chg="mod">
-          <ac:chgData name="Lizethe Pérez Fuertes" userId="4ae9ef87-2a7d-42f8-8dfa-0a501a9e2ff4" providerId="ADAL" clId="{FDDD45CB-1330-4033-A842-3D2746AFF7C7}" dt="2026-06-01T18:42:24.485" v="24" actId="1076"/>
+          <ac:chgData name="Lizethe Pérez Fuertes" userId="4ae9ef87-2a7d-42f8-8dfa-0a501a9e2ff4" providerId="ADAL" clId="{FDDD45CB-1330-4033-A842-3D2746AFF7C7}" dt="2026-06-02T01:23:47.374" v="26" actId="255"/>
           <ac:spMkLst>
             <pc:docMk/>
             <pc:sldMk cId="3330763678" sldId="328"/>
@@ -6648,7 +6648,7 @@
         <p:spPr>
           <a:xfrm>
             <a:off x="467544" y="1268760"/>
-            <a:ext cx="8352928" cy="5243102"/>
+            <a:ext cx="8352928" cy="5430974"/>
           </a:xfrm>
           <a:prstGeom prst="rect">
             <a:avLst/>
@@ -6674,8 +6674,9 @@
                 <a:solidFill>
                   <a:srgbClr val="0070C0"/>
                 </a:solidFill>
-                <a:latin typeface="Arial" panose="020B0604020202020204" pitchFamily="34" charset="0"/>
-                <a:cs typeface="Arial" panose="020B0604020202020204" pitchFamily="34" charset="0"/>
+                <a:latin typeface="Calibri" panose="020F0502020204030204" pitchFamily="34" charset="0"/>
+                <a:ea typeface="Calibri" panose="020F0502020204030204" pitchFamily="34" charset="0"/>
+                <a:cs typeface="Calibri" panose="020F0502020204030204" pitchFamily="34" charset="0"/>
               </a:rPr>
               <a:t>¿Cómo proporcionaría acceso a un dispositivo de red a varios usuarios, cada uno con un nombre de usuario diferente?</a:t>
             </a:r>
@@ -6683,8 +6684,9 @@
               <a:solidFill>
                 <a:srgbClr val="0070C0"/>
               </a:solidFill>
-              <a:latin typeface="Arial" panose="020B0604020202020204" pitchFamily="34" charset="0"/>
-              <a:cs typeface="Arial" panose="020B0604020202020204" pitchFamily="34" charset="0"/>
+              <a:latin typeface="Calibri" panose="020F0502020204030204" pitchFamily="34" charset="0"/>
+              <a:ea typeface="Calibri" panose="020F0502020204030204" pitchFamily="34" charset="0"/>
+              <a:cs typeface="Calibri" panose="020F0502020204030204" pitchFamily="34" charset="0"/>
             </a:endParaRPr>
           </a:p>
           <a:p>
@@ -6695,30 +6697,34 @@
             </a:pPr>
             <a:r>
               <a:rPr lang="es-MX" dirty="0">
-                <a:latin typeface="Arial" panose="020B0604020202020204" pitchFamily="34" charset="0"/>
-                <a:cs typeface="Arial" panose="020B0604020202020204" pitchFamily="34" charset="0"/>
+                <a:latin typeface="Calibri" panose="020F0502020204030204" pitchFamily="34" charset="0"/>
+                <a:ea typeface="Calibri" panose="020F0502020204030204" pitchFamily="34" charset="0"/>
+                <a:cs typeface="Calibri" panose="020F0502020204030204" pitchFamily="34" charset="0"/>
               </a:rPr>
               <a:t>Se agregaría el nombre de usuario y la contraseña de cada usuario a la base de datos local mediante el comando </a:t>
             </a:r>
             <a:r>
               <a:rPr lang="es-MX" b="1" dirty="0" err="1">
-                <a:latin typeface="Arial" panose="020B0604020202020204" pitchFamily="34" charset="0"/>
-                <a:cs typeface="Arial" panose="020B0604020202020204" pitchFamily="34" charset="0"/>
+                <a:latin typeface="Calibri" panose="020F0502020204030204" pitchFamily="34" charset="0"/>
+                <a:ea typeface="Calibri" panose="020F0502020204030204" pitchFamily="34" charset="0"/>
+                <a:cs typeface="Calibri" panose="020F0502020204030204" pitchFamily="34" charset="0"/>
               </a:rPr>
               <a:t>username</a:t>
             </a:r>
             <a:r>
               <a:rPr lang="es-MX" dirty="0">
-                <a:latin typeface="Arial" panose="020B0604020202020204" pitchFamily="34" charset="0"/>
-                <a:cs typeface="Arial" panose="020B0604020202020204" pitchFamily="34" charset="0"/>
+                <a:latin typeface="Calibri" panose="020F0502020204030204" pitchFamily="34" charset="0"/>
+                <a:ea typeface="Calibri" panose="020F0502020204030204" pitchFamily="34" charset="0"/>
+                <a:cs typeface="Calibri" panose="020F0502020204030204" pitchFamily="34" charset="0"/>
               </a:rPr>
               <a:t>.</a:t>
             </a:r>
           </a:p>
           <a:p>
-            <a:endParaRPr lang="es-MX" sz="1200" dirty="0">
-              <a:latin typeface="Arial" panose="020B0604020202020204" pitchFamily="34" charset="0"/>
-              <a:cs typeface="Arial" panose="020B0604020202020204" pitchFamily="34" charset="0"/>
+            <a:endParaRPr lang="es-MX" dirty="0">
+              <a:latin typeface="Calibri" panose="020F0502020204030204" pitchFamily="34" charset="0"/>
+              <a:ea typeface="Calibri" panose="020F0502020204030204" pitchFamily="34" charset="0"/>
+              <a:cs typeface="Calibri" panose="020F0502020204030204" pitchFamily="34" charset="0"/>
             </a:endParaRPr>
           </a:p>
           <a:p>
@@ -6729,8 +6735,9 @@
             </a:pPr>
             <a:r>
               <a:rPr lang="en-US" b="1" dirty="0">
-                <a:latin typeface="Arial" panose="020B0604020202020204" pitchFamily="34" charset="0"/>
-                <a:cs typeface="Arial" panose="020B0604020202020204" pitchFamily="34" charset="0"/>
+                <a:latin typeface="Calibri" panose="020F0502020204030204" pitchFamily="34" charset="0"/>
+                <a:ea typeface="Calibri" panose="020F0502020204030204" pitchFamily="34" charset="0"/>
+                <a:cs typeface="Calibri" panose="020F0502020204030204" pitchFamily="34" charset="0"/>
               </a:rPr>
               <a:t>username admin </a:t>
             </a:r>
@@ -6741,28 +6748,32 @@
                     <a:lumMod val="75000"/>
                   </a:schemeClr>
                 </a:solidFill>
-                <a:latin typeface="Arial" panose="020B0604020202020204" pitchFamily="34" charset="0"/>
-                <a:cs typeface="Arial" panose="020B0604020202020204" pitchFamily="34" charset="0"/>
+                <a:latin typeface="Calibri" panose="020F0502020204030204" pitchFamily="34" charset="0"/>
+                <a:ea typeface="Calibri" panose="020F0502020204030204" pitchFamily="34" charset="0"/>
+                <a:cs typeface="Calibri" panose="020F0502020204030204" pitchFamily="34" charset="0"/>
               </a:rPr>
               <a:t>privilege 15 </a:t>
             </a:r>
             <a:r>
               <a:rPr lang="en-US" b="1" dirty="0">
-                <a:latin typeface="Arial" panose="020B0604020202020204" pitchFamily="34" charset="0"/>
-                <a:cs typeface="Arial" panose="020B0604020202020204" pitchFamily="34" charset="0"/>
+                <a:latin typeface="Calibri" panose="020F0502020204030204" pitchFamily="34" charset="0"/>
+                <a:ea typeface="Calibri" panose="020F0502020204030204" pitchFamily="34" charset="0"/>
+                <a:cs typeface="Calibri" panose="020F0502020204030204" pitchFamily="34" charset="0"/>
               </a:rPr>
               <a:t>secret </a:t>
             </a:r>
             <a:r>
               <a:rPr lang="en-US" b="1" dirty="0" err="1">
-                <a:latin typeface="Arial" panose="020B0604020202020204" pitchFamily="34" charset="0"/>
-                <a:cs typeface="Arial" panose="020B0604020202020204" pitchFamily="34" charset="0"/>
+                <a:latin typeface="Calibri" panose="020F0502020204030204" pitchFamily="34" charset="0"/>
+                <a:ea typeface="Calibri" panose="020F0502020204030204" pitchFamily="34" charset="0"/>
+                <a:cs typeface="Calibri" panose="020F0502020204030204" pitchFamily="34" charset="0"/>
               </a:rPr>
               <a:t>adminpass</a:t>
             </a:r>
             <a:endParaRPr lang="es-MX" dirty="0">
-              <a:latin typeface="Arial" panose="020B0604020202020204" pitchFamily="34" charset="0"/>
-              <a:cs typeface="Arial" panose="020B0604020202020204" pitchFamily="34" charset="0"/>
+              <a:latin typeface="Calibri" panose="020F0502020204030204" pitchFamily="34" charset="0"/>
+              <a:ea typeface="Calibri" panose="020F0502020204030204" pitchFamily="34" charset="0"/>
+              <a:cs typeface="Calibri" panose="020F0502020204030204" pitchFamily="34" charset="0"/>
             </a:endParaRPr>
           </a:p>
           <a:p>
@@ -6773,8 +6784,9 @@
             </a:pPr>
             <a:r>
               <a:rPr lang="en-US" b="1" dirty="0">
-                <a:latin typeface="Arial" panose="020B0604020202020204" pitchFamily="34" charset="0"/>
-                <a:cs typeface="Arial" panose="020B0604020202020204" pitchFamily="34" charset="0"/>
+                <a:latin typeface="Calibri" panose="020F0502020204030204" pitchFamily="34" charset="0"/>
+                <a:ea typeface="Calibri" panose="020F0502020204030204" pitchFamily="34" charset="0"/>
+                <a:cs typeface="Calibri" panose="020F0502020204030204" pitchFamily="34" charset="0"/>
               </a:rPr>
               <a:t>username usuario1 </a:t>
             </a:r>
@@ -6785,28 +6797,32 @@
                     <a:lumMod val="75000"/>
                   </a:schemeClr>
                 </a:solidFill>
-                <a:latin typeface="Arial" panose="020B0604020202020204" pitchFamily="34" charset="0"/>
-                <a:cs typeface="Arial" panose="020B0604020202020204" pitchFamily="34" charset="0"/>
+                <a:latin typeface="Calibri" panose="020F0502020204030204" pitchFamily="34" charset="0"/>
+                <a:ea typeface="Calibri" panose="020F0502020204030204" pitchFamily="34" charset="0"/>
+                <a:cs typeface="Calibri" panose="020F0502020204030204" pitchFamily="34" charset="0"/>
               </a:rPr>
               <a:t>privilege 1 </a:t>
             </a:r>
             <a:r>
               <a:rPr lang="en-US" b="1" dirty="0">
-                <a:latin typeface="Arial" panose="020B0604020202020204" pitchFamily="34" charset="0"/>
-                <a:cs typeface="Arial" panose="020B0604020202020204" pitchFamily="34" charset="0"/>
+                <a:latin typeface="Calibri" panose="020F0502020204030204" pitchFamily="34" charset="0"/>
+                <a:ea typeface="Calibri" panose="020F0502020204030204" pitchFamily="34" charset="0"/>
+                <a:cs typeface="Calibri" panose="020F0502020204030204" pitchFamily="34" charset="0"/>
               </a:rPr>
               <a:t>secret </a:t>
             </a:r>
             <a:r>
               <a:rPr lang="en-US" b="1" dirty="0" err="1">
-                <a:latin typeface="Arial" panose="020B0604020202020204" pitchFamily="34" charset="0"/>
-                <a:cs typeface="Arial" panose="020B0604020202020204" pitchFamily="34" charset="0"/>
+                <a:latin typeface="Calibri" panose="020F0502020204030204" pitchFamily="34" charset="0"/>
+                <a:ea typeface="Calibri" panose="020F0502020204030204" pitchFamily="34" charset="0"/>
+                <a:cs typeface="Calibri" panose="020F0502020204030204" pitchFamily="34" charset="0"/>
               </a:rPr>
               <a:t>userpass</a:t>
             </a:r>
             <a:endParaRPr lang="es-MX" dirty="0">
-              <a:latin typeface="Arial" panose="020B0604020202020204" pitchFamily="34" charset="0"/>
-              <a:cs typeface="Arial" panose="020B0604020202020204" pitchFamily="34" charset="0"/>
+              <a:latin typeface="Calibri" panose="020F0502020204030204" pitchFamily="34" charset="0"/>
+              <a:ea typeface="Calibri" panose="020F0502020204030204" pitchFamily="34" charset="0"/>
+              <a:cs typeface="Calibri" panose="020F0502020204030204" pitchFamily="34" charset="0"/>
             </a:endParaRPr>
           </a:p>
           <a:p>
@@ -6817,8 +6833,9 @@
             </a:pPr>
             <a:r>
               <a:rPr lang="en-US" b="1" dirty="0">
-                <a:latin typeface="Arial" panose="020B0604020202020204" pitchFamily="34" charset="0"/>
-                <a:cs typeface="Arial" panose="020B0604020202020204" pitchFamily="34" charset="0"/>
+                <a:latin typeface="Calibri" panose="020F0502020204030204" pitchFamily="34" charset="0"/>
+                <a:ea typeface="Calibri" panose="020F0502020204030204" pitchFamily="34" charset="0"/>
+                <a:cs typeface="Calibri" panose="020F0502020204030204" pitchFamily="34" charset="0"/>
               </a:rPr>
               <a:t>username usuario2 </a:t>
             </a:r>
@@ -6829,34 +6846,39 @@
                     <a:lumMod val="75000"/>
                   </a:schemeClr>
                 </a:solidFill>
-                <a:latin typeface="Arial" panose="020B0604020202020204" pitchFamily="34" charset="0"/>
-                <a:cs typeface="Arial" panose="020B0604020202020204" pitchFamily="34" charset="0"/>
+                <a:latin typeface="Calibri" panose="020F0502020204030204" pitchFamily="34" charset="0"/>
+                <a:ea typeface="Calibri" panose="020F0502020204030204" pitchFamily="34" charset="0"/>
+                <a:cs typeface="Calibri" panose="020F0502020204030204" pitchFamily="34" charset="0"/>
               </a:rPr>
               <a:t>privilege 1 </a:t>
             </a:r>
             <a:r>
               <a:rPr lang="en-US" b="1" dirty="0">
-                <a:latin typeface="Arial" panose="020B0604020202020204" pitchFamily="34" charset="0"/>
-                <a:cs typeface="Arial" panose="020B0604020202020204" pitchFamily="34" charset="0"/>
+                <a:latin typeface="Calibri" panose="020F0502020204030204" pitchFamily="34" charset="0"/>
+                <a:ea typeface="Calibri" panose="020F0502020204030204" pitchFamily="34" charset="0"/>
+                <a:cs typeface="Calibri" panose="020F0502020204030204" pitchFamily="34" charset="0"/>
               </a:rPr>
               <a:t>secret </a:t>
             </a:r>
             <a:r>
               <a:rPr lang="en-US" b="1" dirty="0" err="1">
-                <a:latin typeface="Arial" panose="020B0604020202020204" pitchFamily="34" charset="0"/>
-                <a:cs typeface="Arial" panose="020B0604020202020204" pitchFamily="34" charset="0"/>
+                <a:latin typeface="Calibri" panose="020F0502020204030204" pitchFamily="34" charset="0"/>
+                <a:ea typeface="Calibri" panose="020F0502020204030204" pitchFamily="34" charset="0"/>
+                <a:cs typeface="Calibri" panose="020F0502020204030204" pitchFamily="34" charset="0"/>
               </a:rPr>
               <a:t>userpass</a:t>
             </a:r>
             <a:endParaRPr lang="es-MX" dirty="0">
-              <a:latin typeface="Arial" panose="020B0604020202020204" pitchFamily="34" charset="0"/>
-              <a:cs typeface="Arial" panose="020B0604020202020204" pitchFamily="34" charset="0"/>
+              <a:latin typeface="Calibri" panose="020F0502020204030204" pitchFamily="34" charset="0"/>
+              <a:ea typeface="Calibri" panose="020F0502020204030204" pitchFamily="34" charset="0"/>
+              <a:cs typeface="Calibri" panose="020F0502020204030204" pitchFamily="34" charset="0"/>
             </a:endParaRPr>
           </a:p>
           <a:p>
-            <a:endParaRPr lang="es-MX" sz="800" dirty="0">
-              <a:latin typeface="Arial" panose="020B0604020202020204" pitchFamily="34" charset="0"/>
-              <a:cs typeface="Arial" panose="020B0604020202020204" pitchFamily="34" charset="0"/>
+            <a:endParaRPr lang="es-MX" dirty="0">
+              <a:latin typeface="Calibri" panose="020F0502020204030204" pitchFamily="34" charset="0"/>
+              <a:ea typeface="Calibri" panose="020F0502020204030204" pitchFamily="34" charset="0"/>
+              <a:cs typeface="Calibri" panose="020F0502020204030204" pitchFamily="34" charset="0"/>
             </a:endParaRPr>
           </a:p>
           <a:p>
@@ -6867,51 +6889,58 @@
             </a:pPr>
             <a:r>
               <a:rPr lang="es-MX" b="1" dirty="0">
-                <a:latin typeface="Arial" panose="020B0604020202020204" pitchFamily="34" charset="0"/>
-                <a:cs typeface="Arial" panose="020B0604020202020204" pitchFamily="34" charset="0"/>
+                <a:latin typeface="Calibri" panose="020F0502020204030204" pitchFamily="34" charset="0"/>
+                <a:ea typeface="Calibri" panose="020F0502020204030204" pitchFamily="34" charset="0"/>
+                <a:cs typeface="Calibri" panose="020F0502020204030204" pitchFamily="34" charset="0"/>
               </a:rPr>
               <a:t>Nota:</a:t>
             </a:r>
             <a:r>
               <a:rPr lang="es-MX" dirty="0">
-                <a:latin typeface="Arial" panose="020B0604020202020204" pitchFamily="34" charset="0"/>
-                <a:cs typeface="Arial" panose="020B0604020202020204" pitchFamily="34" charset="0"/>
+                <a:latin typeface="Calibri" panose="020F0502020204030204" pitchFamily="34" charset="0"/>
+                <a:ea typeface="Calibri" panose="020F0502020204030204" pitchFamily="34" charset="0"/>
+                <a:cs typeface="Calibri" panose="020F0502020204030204" pitchFamily="34" charset="0"/>
               </a:rPr>
               <a:t> Un nivel de privilegio de </a:t>
             </a:r>
             <a:r>
               <a:rPr lang="es-MX" b="1" dirty="0">
-                <a:latin typeface="Arial" panose="020B0604020202020204" pitchFamily="34" charset="0"/>
-                <a:cs typeface="Arial" panose="020B0604020202020204" pitchFamily="34" charset="0"/>
+                <a:latin typeface="Calibri" panose="020F0502020204030204" pitchFamily="34" charset="0"/>
+                <a:ea typeface="Calibri" panose="020F0502020204030204" pitchFamily="34" charset="0"/>
+                <a:cs typeface="Calibri" panose="020F0502020204030204" pitchFamily="34" charset="0"/>
               </a:rPr>
               <a:t>15</a:t>
             </a:r>
             <a:r>
               <a:rPr lang="es-MX" dirty="0">
-                <a:latin typeface="Arial" panose="020B0604020202020204" pitchFamily="34" charset="0"/>
-                <a:cs typeface="Arial" panose="020B0604020202020204" pitchFamily="34" charset="0"/>
+                <a:latin typeface="Calibri" panose="020F0502020204030204" pitchFamily="34" charset="0"/>
+                <a:ea typeface="Calibri" panose="020F0502020204030204" pitchFamily="34" charset="0"/>
+                <a:cs typeface="Calibri" panose="020F0502020204030204" pitchFamily="34" charset="0"/>
               </a:rPr>
               <a:t> otorga al usuario derechos de </a:t>
             </a:r>
             <a:r>
               <a:rPr lang="es-MX" b="1" dirty="0">
-                <a:latin typeface="Arial" panose="020B0604020202020204" pitchFamily="34" charset="0"/>
-                <a:cs typeface="Arial" panose="020B0604020202020204" pitchFamily="34" charset="0"/>
+                <a:latin typeface="Calibri" panose="020F0502020204030204" pitchFamily="34" charset="0"/>
+                <a:ea typeface="Calibri" panose="020F0502020204030204" pitchFamily="34" charset="0"/>
+                <a:cs typeface="Calibri" panose="020F0502020204030204" pitchFamily="34" charset="0"/>
               </a:rPr>
               <a:t>administrador</a:t>
             </a:r>
             <a:r>
               <a:rPr lang="es-MX" dirty="0">
-                <a:latin typeface="Arial" panose="020B0604020202020204" pitchFamily="34" charset="0"/>
-                <a:cs typeface="Arial" panose="020B0604020202020204" pitchFamily="34" charset="0"/>
+                <a:latin typeface="Calibri" panose="020F0502020204030204" pitchFamily="34" charset="0"/>
+                <a:ea typeface="Calibri" panose="020F0502020204030204" pitchFamily="34" charset="0"/>
+                <a:cs typeface="Calibri" panose="020F0502020204030204" pitchFamily="34" charset="0"/>
               </a:rPr>
               <a:t>.</a:t>
             </a:r>
           </a:p>
           <a:p>
             <a:endParaRPr lang="es-MX" dirty="0">
-              <a:latin typeface="Arial" panose="020B0604020202020204" pitchFamily="34" charset="0"/>
-              <a:cs typeface="Arial" panose="020B0604020202020204" pitchFamily="34" charset="0"/>
+              <a:latin typeface="Calibri" panose="020F0502020204030204" pitchFamily="34" charset="0"/>
+              <a:ea typeface="Calibri" panose="020F0502020204030204" pitchFamily="34" charset="0"/>
+              <a:cs typeface="Calibri" panose="020F0502020204030204" pitchFamily="34" charset="0"/>
             </a:endParaRPr>
           </a:p>
           <a:p>
@@ -6922,8 +6951,9 @@
             </a:pPr>
             <a:r>
               <a:rPr lang="es-MX" dirty="0">
-                <a:latin typeface="Arial" panose="020B0604020202020204" pitchFamily="34" charset="0"/>
-                <a:cs typeface="Arial" panose="020B0604020202020204" pitchFamily="34" charset="0"/>
+                <a:latin typeface="Calibri" panose="020F0502020204030204" pitchFamily="34" charset="0"/>
+                <a:ea typeface="Calibri" panose="020F0502020204030204" pitchFamily="34" charset="0"/>
+                <a:cs typeface="Calibri" panose="020F0502020204030204" pitchFamily="34" charset="0"/>
               </a:rPr>
               <a:t>La CLI del Cisco IOS tiene dos niveles de acceso a los comandos:</a:t>
             </a:r>
@@ -6943,50 +6973,57 @@
                     <a:lumMod val="75000"/>
                   </a:schemeClr>
                 </a:solidFill>
-                <a:latin typeface="Arial" panose="020B0604020202020204" pitchFamily="34" charset="0"/>
-                <a:cs typeface="Arial" panose="020B0604020202020204" pitchFamily="34" charset="0"/>
+                <a:latin typeface="Calibri" panose="020F0502020204030204" pitchFamily="34" charset="0"/>
+                <a:ea typeface="Calibri" panose="020F0502020204030204" pitchFamily="34" charset="0"/>
+                <a:cs typeface="Calibri" panose="020F0502020204030204" pitchFamily="34" charset="0"/>
               </a:rPr>
               <a:t>Modo EXEC de usuario (nivel de privilegio 1)</a:t>
             </a:r>
             <a:r>
               <a:rPr lang="es-MX" dirty="0">
-                <a:latin typeface="Arial" panose="020B0604020202020204" pitchFamily="34" charset="0"/>
-                <a:cs typeface="Arial" panose="020B0604020202020204" pitchFamily="34" charset="0"/>
+                <a:latin typeface="Calibri" panose="020F0502020204030204" pitchFamily="34" charset="0"/>
+                <a:ea typeface="Calibri" panose="020F0502020204030204" pitchFamily="34" charset="0"/>
+                <a:cs typeface="Calibri" panose="020F0502020204030204" pitchFamily="34" charset="0"/>
               </a:rPr>
               <a:t>: proporciona los privilegios de usuario de modo EXEC más bajos y permite que solo estén disponibles los comandos del nivel de usuario en el </a:t>
             </a:r>
             <a:r>
               <a:rPr lang="es-MX" dirty="0" err="1">
-                <a:latin typeface="Arial" panose="020B0604020202020204" pitchFamily="34" charset="0"/>
-                <a:cs typeface="Arial" panose="020B0604020202020204" pitchFamily="34" charset="0"/>
+                <a:latin typeface="Calibri" panose="020F0502020204030204" pitchFamily="34" charset="0"/>
+                <a:ea typeface="Calibri" panose="020F0502020204030204" pitchFamily="34" charset="0"/>
+                <a:cs typeface="Calibri" panose="020F0502020204030204" pitchFamily="34" charset="0"/>
               </a:rPr>
               <a:t>prompt</a:t>
             </a:r>
             <a:r>
               <a:rPr lang="es-MX" dirty="0">
-                <a:latin typeface="Arial" panose="020B0604020202020204" pitchFamily="34" charset="0"/>
-                <a:cs typeface="Arial" panose="020B0604020202020204" pitchFamily="34" charset="0"/>
+                <a:latin typeface="Calibri" panose="020F0502020204030204" pitchFamily="34" charset="0"/>
+                <a:ea typeface="Calibri" panose="020F0502020204030204" pitchFamily="34" charset="0"/>
+                <a:cs typeface="Calibri" panose="020F0502020204030204" pitchFamily="34" charset="0"/>
               </a:rPr>
               <a:t> </a:t>
             </a:r>
             <a:r>
               <a:rPr lang="es-MX" b="1" dirty="0" err="1">
-                <a:latin typeface="Arial" panose="020B0604020202020204" pitchFamily="34" charset="0"/>
-                <a:cs typeface="Arial" panose="020B0604020202020204" pitchFamily="34" charset="0"/>
+                <a:latin typeface="Calibri" panose="020F0502020204030204" pitchFamily="34" charset="0"/>
+                <a:ea typeface="Calibri" panose="020F0502020204030204" pitchFamily="34" charset="0"/>
+                <a:cs typeface="Calibri" panose="020F0502020204030204" pitchFamily="34" charset="0"/>
               </a:rPr>
               <a:t>router</a:t>
             </a:r>
             <a:r>
               <a:rPr lang="es-MX" b="1" dirty="0">
-                <a:latin typeface="Arial" panose="020B0604020202020204" pitchFamily="34" charset="0"/>
-                <a:cs typeface="Arial" panose="020B0604020202020204" pitchFamily="34" charset="0"/>
+                <a:latin typeface="Calibri" panose="020F0502020204030204" pitchFamily="34" charset="0"/>
+                <a:ea typeface="Calibri" panose="020F0502020204030204" pitchFamily="34" charset="0"/>
+                <a:cs typeface="Calibri" panose="020F0502020204030204" pitchFamily="34" charset="0"/>
               </a:rPr>
               <a:t>&gt;</a:t>
             </a:r>
             <a:r>
               <a:rPr lang="es-MX" dirty="0">
-                <a:latin typeface="Arial" panose="020B0604020202020204" pitchFamily="34" charset="0"/>
-                <a:cs typeface="Arial" panose="020B0604020202020204" pitchFamily="34" charset="0"/>
+                <a:latin typeface="Calibri" panose="020F0502020204030204" pitchFamily="34" charset="0"/>
+                <a:ea typeface="Calibri" panose="020F0502020204030204" pitchFamily="34" charset="0"/>
+                <a:cs typeface="Calibri" panose="020F0502020204030204" pitchFamily="34" charset="0"/>
               </a:rPr>
               <a:t>.</a:t>
             </a:r>
@@ -7006,50 +7043,57 @@
                     <a:lumMod val="75000"/>
                   </a:schemeClr>
                 </a:solidFill>
-                <a:latin typeface="Arial" panose="020B0604020202020204" pitchFamily="34" charset="0"/>
-                <a:cs typeface="Arial" panose="020B0604020202020204" pitchFamily="34" charset="0"/>
+                <a:latin typeface="Calibri" panose="020F0502020204030204" pitchFamily="34" charset="0"/>
+                <a:ea typeface="Calibri" panose="020F0502020204030204" pitchFamily="34" charset="0"/>
+                <a:cs typeface="Calibri" panose="020F0502020204030204" pitchFamily="34" charset="0"/>
               </a:rPr>
               <a:t>Modo EXEC privilegiado (nivel de privilegio 15)</a:t>
             </a:r>
             <a:r>
               <a:rPr lang="es-MX" dirty="0">
-                <a:latin typeface="Arial" panose="020B0604020202020204" pitchFamily="34" charset="0"/>
-                <a:cs typeface="Arial" panose="020B0604020202020204" pitchFamily="34" charset="0"/>
+                <a:latin typeface="Calibri" panose="020F0502020204030204" pitchFamily="34" charset="0"/>
+                <a:ea typeface="Calibri" panose="020F0502020204030204" pitchFamily="34" charset="0"/>
+                <a:cs typeface="Calibri" panose="020F0502020204030204" pitchFamily="34" charset="0"/>
               </a:rPr>
               <a:t>: incluye todos los comandos de nivel de privilegiado en el </a:t>
             </a:r>
             <a:r>
               <a:rPr lang="es-MX" dirty="0" err="1">
-                <a:latin typeface="Arial" panose="020B0604020202020204" pitchFamily="34" charset="0"/>
-                <a:cs typeface="Arial" panose="020B0604020202020204" pitchFamily="34" charset="0"/>
+                <a:latin typeface="Calibri" panose="020F0502020204030204" pitchFamily="34" charset="0"/>
+                <a:ea typeface="Calibri" panose="020F0502020204030204" pitchFamily="34" charset="0"/>
+                <a:cs typeface="Calibri" panose="020F0502020204030204" pitchFamily="34" charset="0"/>
               </a:rPr>
               <a:t>prompt</a:t>
             </a:r>
             <a:r>
               <a:rPr lang="es-MX" dirty="0">
-                <a:latin typeface="Arial" panose="020B0604020202020204" pitchFamily="34" charset="0"/>
-                <a:cs typeface="Arial" panose="020B0604020202020204" pitchFamily="34" charset="0"/>
+                <a:latin typeface="Calibri" panose="020F0502020204030204" pitchFamily="34" charset="0"/>
+                <a:ea typeface="Calibri" panose="020F0502020204030204" pitchFamily="34" charset="0"/>
+                <a:cs typeface="Calibri" panose="020F0502020204030204" pitchFamily="34" charset="0"/>
               </a:rPr>
               <a:t> </a:t>
             </a:r>
             <a:r>
               <a:rPr lang="es-MX" b="1" dirty="0" err="1">
-                <a:latin typeface="Arial" panose="020B0604020202020204" pitchFamily="34" charset="0"/>
-                <a:cs typeface="Arial" panose="020B0604020202020204" pitchFamily="34" charset="0"/>
+                <a:latin typeface="Calibri" panose="020F0502020204030204" pitchFamily="34" charset="0"/>
+                <a:ea typeface="Calibri" panose="020F0502020204030204" pitchFamily="34" charset="0"/>
+                <a:cs typeface="Calibri" panose="020F0502020204030204" pitchFamily="34" charset="0"/>
               </a:rPr>
               <a:t>router</a:t>
             </a:r>
             <a:r>
               <a:rPr lang="es-MX" b="1" dirty="0">
-                <a:latin typeface="Arial" panose="020B0604020202020204" pitchFamily="34" charset="0"/>
-                <a:cs typeface="Arial" panose="020B0604020202020204" pitchFamily="34" charset="0"/>
+                <a:latin typeface="Calibri" panose="020F0502020204030204" pitchFamily="34" charset="0"/>
+                <a:ea typeface="Calibri" panose="020F0502020204030204" pitchFamily="34" charset="0"/>
+                <a:cs typeface="Calibri" panose="020F0502020204030204" pitchFamily="34" charset="0"/>
               </a:rPr>
               <a:t>#</a:t>
             </a:r>
             <a:r>
               <a:rPr lang="es-MX" dirty="0">
-                <a:latin typeface="Arial" panose="020B0604020202020204" pitchFamily="34" charset="0"/>
-                <a:cs typeface="Arial" panose="020B0604020202020204" pitchFamily="34" charset="0"/>
+                <a:latin typeface="Calibri" panose="020F0502020204030204" pitchFamily="34" charset="0"/>
+                <a:ea typeface="Calibri" panose="020F0502020204030204" pitchFamily="34" charset="0"/>
+                <a:cs typeface="Calibri" panose="020F0502020204030204" pitchFamily="34" charset="0"/>
               </a:rPr>
               <a:t>.</a:t>
             </a:r>
